--- a/docs/pptx/carbo/ritu-carbo-linsubhr-dosedisc-throm2.pptx
+++ b/docs/pptx/carbo/ritu-carbo-linsubhr-dosedisc-throm2.pptx
@@ -2443,7 +2443,7 @@
           </p:nvSpPr>
           <p:spPr>
             <a:xfrm>
-              <a:off x="909675" y="1896563"/>
+              <a:off x="911833" y="1896563"/>
               <a:ext cx="0" cy="3826579"/>
             </a:xfrm>
             <a:custGeom>
@@ -2486,7 +2486,7 @@
           </p:nvSpPr>
           <p:spPr>
             <a:xfrm>
-              <a:off x="3323794" y="1896563"/>
+              <a:off x="3322810" y="1896563"/>
               <a:ext cx="0" cy="3826579"/>
             </a:xfrm>
             <a:custGeom>
@@ -2529,7 +2529,7 @@
           </p:nvSpPr>
           <p:spPr>
             <a:xfrm>
-              <a:off x="5737913" y="1896563"/>
+              <a:off x="5733788" y="1896563"/>
               <a:ext cx="0" cy="3826579"/>
             </a:xfrm>
             <a:custGeom>
@@ -2572,7 +2572,7 @@
           </p:nvSpPr>
           <p:spPr>
             <a:xfrm>
-              <a:off x="8152032" y="1896563"/>
+              <a:off x="8144765" y="1896563"/>
               <a:ext cx="0" cy="3826579"/>
             </a:xfrm>
             <a:custGeom>
@@ -2830,7 +2830,7 @@
           </p:nvSpPr>
           <p:spPr>
             <a:xfrm>
-              <a:off x="2116734" y="1896563"/>
+              <a:off x="2117321" y="1896563"/>
               <a:ext cx="0" cy="3826579"/>
             </a:xfrm>
             <a:custGeom>
@@ -2873,7 +2873,7 @@
           </p:nvSpPr>
           <p:spPr>
             <a:xfrm>
-              <a:off x="4530853" y="1896563"/>
+              <a:off x="4528299" y="1896563"/>
               <a:ext cx="0" cy="3826579"/>
             </a:xfrm>
             <a:custGeom>
@@ -2916,7 +2916,7 @@
           </p:nvSpPr>
           <p:spPr>
             <a:xfrm>
-              <a:off x="6944973" y="1896563"/>
+              <a:off x="6939276" y="1896563"/>
               <a:ext cx="0" cy="3826579"/>
             </a:xfrm>
             <a:custGeom>
@@ -2960,533 +2960,533 @@
           <p:spPr>
             <a:xfrm>
               <a:off x="1172049" y="1896563"/>
-              <a:ext cx="7090630" cy="3590122"/>
+              <a:ext cx="7090630" cy="3589913"/>
             </a:xfrm>
             <a:custGeom>
               <a:avLst/>
               <a:pathLst>
-                <a:path w="7090630" h="3590122">
+                <a:path w="7090630" h="3589913">
                   <a:moveTo>
-                    <a:pt x="0" y="1970755"/>
+                    <a:pt x="0" y="1972160"/>
                   </a:moveTo>
                   <a:lnTo>
-                    <a:pt x="71622" y="1994658"/>
-                  </a:lnTo>
-                  <a:lnTo>
-                    <a:pt x="143245" y="2018221"/>
-                  </a:lnTo>
-                  <a:lnTo>
-                    <a:pt x="214867" y="2041449"/>
-                  </a:lnTo>
-                  <a:lnTo>
-                    <a:pt x="286490" y="2064346"/>
-                  </a:lnTo>
-                  <a:lnTo>
-                    <a:pt x="358112" y="2086919"/>
-                  </a:lnTo>
-                  <a:lnTo>
-                    <a:pt x="429735" y="2109171"/>
-                  </a:lnTo>
-                  <a:lnTo>
-                    <a:pt x="501357" y="2131106"/>
-                  </a:lnTo>
-                  <a:lnTo>
-                    <a:pt x="572980" y="2152730"/>
-                  </a:lnTo>
-                  <a:lnTo>
-                    <a:pt x="644602" y="2174046"/>
-                  </a:lnTo>
-                  <a:lnTo>
-                    <a:pt x="716225" y="2195059"/>
-                  </a:lnTo>
-                  <a:lnTo>
-                    <a:pt x="787847" y="2215774"/>
-                  </a:lnTo>
-                  <a:lnTo>
-                    <a:pt x="859470" y="2236195"/>
-                  </a:lnTo>
-                  <a:lnTo>
-                    <a:pt x="931092" y="2256325"/>
-                  </a:lnTo>
-                  <a:lnTo>
-                    <a:pt x="1002715" y="2276169"/>
-                  </a:lnTo>
-                  <a:lnTo>
-                    <a:pt x="1074337" y="2295731"/>
-                  </a:lnTo>
-                  <a:lnTo>
-                    <a:pt x="1145960" y="2315015"/>
-                  </a:lnTo>
-                  <a:lnTo>
-                    <a:pt x="1217582" y="2334025"/>
-                  </a:lnTo>
-                  <a:lnTo>
-                    <a:pt x="1289205" y="2352765"/>
-                  </a:lnTo>
-                  <a:lnTo>
-                    <a:pt x="1360827" y="2371239"/>
-                  </a:lnTo>
-                  <a:lnTo>
-                    <a:pt x="1432450" y="2389449"/>
-                  </a:lnTo>
-                  <a:lnTo>
-                    <a:pt x="1504073" y="2407402"/>
-                  </a:lnTo>
-                  <a:lnTo>
-                    <a:pt x="1575695" y="2425099"/>
-                  </a:lnTo>
-                  <a:lnTo>
-                    <a:pt x="1647318" y="2442544"/>
-                  </a:lnTo>
-                  <a:lnTo>
-                    <a:pt x="1718940" y="2459742"/>
-                  </a:lnTo>
-                  <a:lnTo>
-                    <a:pt x="1790563" y="2476695"/>
-                  </a:lnTo>
-                  <a:lnTo>
-                    <a:pt x="1862185" y="2493407"/>
-                  </a:lnTo>
-                  <a:lnTo>
-                    <a:pt x="1933808" y="2509882"/>
-                  </a:lnTo>
-                  <a:lnTo>
-                    <a:pt x="2005430" y="2526123"/>
-                  </a:lnTo>
-                  <a:lnTo>
-                    <a:pt x="2077053" y="2542132"/>
-                  </a:lnTo>
-                  <a:lnTo>
-                    <a:pt x="2148675" y="2557915"/>
-                  </a:lnTo>
-                  <a:lnTo>
-                    <a:pt x="2220298" y="2573473"/>
-                  </a:lnTo>
-                  <a:lnTo>
-                    <a:pt x="2291920" y="2588810"/>
-                  </a:lnTo>
-                  <a:lnTo>
-                    <a:pt x="2363543" y="2603929"/>
-                  </a:lnTo>
-                  <a:lnTo>
-                    <a:pt x="2435165" y="2618833"/>
-                  </a:lnTo>
-                  <a:lnTo>
-                    <a:pt x="2506788" y="2633525"/>
-                  </a:lnTo>
-                  <a:lnTo>
-                    <a:pt x="2578410" y="2648008"/>
-                  </a:lnTo>
-                  <a:lnTo>
-                    <a:pt x="2650033" y="2662286"/>
-                  </a:lnTo>
-                  <a:lnTo>
-                    <a:pt x="2721655" y="2676361"/>
-                  </a:lnTo>
-                  <a:lnTo>
-                    <a:pt x="2793278" y="2690235"/>
-                  </a:lnTo>
-                  <a:lnTo>
-                    <a:pt x="2864901" y="2703913"/>
-                  </a:lnTo>
-                  <a:lnTo>
-                    <a:pt x="2936523" y="2717396"/>
-                  </a:lnTo>
-                  <a:lnTo>
-                    <a:pt x="3008146" y="2730687"/>
-                  </a:lnTo>
-                  <a:lnTo>
-                    <a:pt x="3079768" y="2743790"/>
-                  </a:lnTo>
-                  <a:lnTo>
-                    <a:pt x="3151391" y="2756706"/>
-                  </a:lnTo>
-                  <a:lnTo>
-                    <a:pt x="3223013" y="2769439"/>
-                  </a:lnTo>
-                  <a:lnTo>
-                    <a:pt x="3294636" y="2781991"/>
-                  </a:lnTo>
-                  <a:lnTo>
-                    <a:pt x="3366258" y="2735942"/>
-                  </a:lnTo>
-                  <a:lnTo>
-                    <a:pt x="3437881" y="2682042"/>
-                  </a:lnTo>
-                  <a:lnTo>
-                    <a:pt x="3509503" y="2624974"/>
-                  </a:lnTo>
-                  <a:lnTo>
-                    <a:pt x="3581126" y="2564550"/>
-                  </a:lnTo>
-                  <a:lnTo>
-                    <a:pt x="3652748" y="2500573"/>
-                  </a:lnTo>
-                  <a:lnTo>
-                    <a:pt x="3724371" y="2432835"/>
-                  </a:lnTo>
-                  <a:lnTo>
-                    <a:pt x="3795993" y="2361114"/>
-                  </a:lnTo>
-                  <a:lnTo>
-                    <a:pt x="3867616" y="2285175"/>
-                  </a:lnTo>
-                  <a:lnTo>
-                    <a:pt x="3939238" y="2204772"/>
-                  </a:lnTo>
-                  <a:lnTo>
-                    <a:pt x="4010861" y="2119642"/>
-                  </a:lnTo>
-                  <a:lnTo>
-                    <a:pt x="4082483" y="2029506"/>
-                  </a:lnTo>
-                  <a:lnTo>
-                    <a:pt x="4154106" y="1934070"/>
-                  </a:lnTo>
-                  <a:lnTo>
-                    <a:pt x="4225729" y="1833023"/>
-                  </a:lnTo>
-                  <a:lnTo>
-                    <a:pt x="4297351" y="1726035"/>
-                  </a:lnTo>
-                  <a:lnTo>
-                    <a:pt x="4368974" y="1612756"/>
-                  </a:lnTo>
-                  <a:lnTo>
-                    <a:pt x="4440596" y="1492816"/>
-                  </a:lnTo>
-                  <a:lnTo>
-                    <a:pt x="4512219" y="1365825"/>
-                  </a:lnTo>
-                  <a:lnTo>
-                    <a:pt x="4583841" y="1231367"/>
-                  </a:lnTo>
-                  <a:lnTo>
-                    <a:pt x="4655464" y="1089003"/>
-                  </a:lnTo>
-                  <a:lnTo>
-                    <a:pt x="4727086" y="938268"/>
-                  </a:lnTo>
-                  <a:lnTo>
-                    <a:pt x="4798709" y="778671"/>
-                  </a:lnTo>
-                  <a:lnTo>
-                    <a:pt x="4870331" y="609690"/>
-                  </a:lnTo>
-                  <a:lnTo>
-                    <a:pt x="4941954" y="430773"/>
-                  </a:lnTo>
-                  <a:lnTo>
-                    <a:pt x="5013576" y="241336"/>
-                  </a:lnTo>
-                  <a:lnTo>
-                    <a:pt x="5085199" y="40761"/>
-                  </a:lnTo>
-                  <a:lnTo>
-                    <a:pt x="5098946" y="0"/>
+                    <a:pt x="71622" y="1996074"/>
+                  </a:lnTo>
+                  <a:lnTo>
+                    <a:pt x="143245" y="2019647"/>
+                  </a:lnTo>
+                  <a:lnTo>
+                    <a:pt x="214867" y="2042885"/>
+                  </a:lnTo>
+                  <a:lnTo>
+                    <a:pt x="286490" y="2065792"/>
+                  </a:lnTo>
+                  <a:lnTo>
+                    <a:pt x="358112" y="2088373"/>
+                  </a:lnTo>
+                  <a:lnTo>
+                    <a:pt x="429735" y="2110632"/>
+                  </a:lnTo>
+                  <a:lnTo>
+                    <a:pt x="501357" y="2132575"/>
+                  </a:lnTo>
+                  <a:lnTo>
+                    <a:pt x="572980" y="2154206"/>
+                  </a:lnTo>
+                  <a:lnTo>
+                    <a:pt x="644602" y="2175529"/>
+                  </a:lnTo>
+                  <a:lnTo>
+                    <a:pt x="716225" y="2196549"/>
+                  </a:lnTo>
+                  <a:lnTo>
+                    <a:pt x="787847" y="2217269"/>
+                  </a:lnTo>
+                  <a:lnTo>
+                    <a:pt x="859470" y="2237695"/>
+                  </a:lnTo>
+                  <a:lnTo>
+                    <a:pt x="931092" y="2257829"/>
+                  </a:lnTo>
+                  <a:lnTo>
+                    <a:pt x="1002715" y="2277678"/>
+                  </a:lnTo>
+                  <a:lnTo>
+                    <a:pt x="1074337" y="2297244"/>
+                  </a:lnTo>
+                  <a:lnTo>
+                    <a:pt x="1145960" y="2316531"/>
+                  </a:lnTo>
+                  <a:lnTo>
+                    <a:pt x="1217582" y="2335544"/>
+                  </a:lnTo>
+                  <a:lnTo>
+                    <a:pt x="1289205" y="2354287"/>
+                  </a:lnTo>
+                  <a:lnTo>
+                    <a:pt x="1360827" y="2372762"/>
+                  </a:lnTo>
+                  <a:lnTo>
+                    <a:pt x="1432450" y="2390975"/>
+                  </a:lnTo>
+                  <a:lnTo>
+                    <a:pt x="1504073" y="2408929"/>
+                  </a:lnTo>
+                  <a:lnTo>
+                    <a:pt x="1575695" y="2426627"/>
+                  </a:lnTo>
+                  <a:lnTo>
+                    <a:pt x="1647318" y="2444073"/>
+                  </a:lnTo>
+                  <a:lnTo>
+                    <a:pt x="1718940" y="2461272"/>
+                  </a:lnTo>
+                  <a:lnTo>
+                    <a:pt x="1790563" y="2478225"/>
+                  </a:lnTo>
+                  <a:lnTo>
+                    <a:pt x="1862185" y="2494937"/>
+                  </a:lnTo>
+                  <a:lnTo>
+                    <a:pt x="1933808" y="2511411"/>
+                  </a:lnTo>
+                  <a:lnTo>
+                    <a:pt x="2005430" y="2527651"/>
+                  </a:lnTo>
+                  <a:lnTo>
+                    <a:pt x="2077053" y="2543660"/>
+                  </a:lnTo>
+                  <a:lnTo>
+                    <a:pt x="2148675" y="2559441"/>
+                  </a:lnTo>
+                  <a:lnTo>
+                    <a:pt x="2220298" y="2574997"/>
+                  </a:lnTo>
+                  <a:lnTo>
+                    <a:pt x="2291920" y="2590332"/>
+                  </a:lnTo>
+                  <a:lnTo>
+                    <a:pt x="2363543" y="2605449"/>
+                  </a:lnTo>
+                  <a:lnTo>
+                    <a:pt x="2435165" y="2620351"/>
+                  </a:lnTo>
+                  <a:lnTo>
+                    <a:pt x="2506788" y="2635040"/>
+                  </a:lnTo>
+                  <a:lnTo>
+                    <a:pt x="2578410" y="2649521"/>
+                  </a:lnTo>
+                  <a:lnTo>
+                    <a:pt x="2650033" y="2663796"/>
+                  </a:lnTo>
+                  <a:lnTo>
+                    <a:pt x="2721655" y="2677867"/>
+                  </a:lnTo>
+                  <a:lnTo>
+                    <a:pt x="2793278" y="2691738"/>
+                  </a:lnTo>
+                  <a:lnTo>
+                    <a:pt x="2864901" y="2705412"/>
+                  </a:lnTo>
+                  <a:lnTo>
+                    <a:pt x="2936523" y="2718891"/>
+                  </a:lnTo>
+                  <a:lnTo>
+                    <a:pt x="3008146" y="2732179"/>
+                  </a:lnTo>
+                  <a:lnTo>
+                    <a:pt x="3079768" y="2745277"/>
+                  </a:lnTo>
+                  <a:lnTo>
+                    <a:pt x="3151391" y="2758189"/>
+                  </a:lnTo>
+                  <a:lnTo>
+                    <a:pt x="3223013" y="2770917"/>
+                  </a:lnTo>
+                  <a:lnTo>
+                    <a:pt x="3294636" y="2780976"/>
+                  </a:lnTo>
+                  <a:lnTo>
+                    <a:pt x="3366258" y="2729656"/>
+                  </a:lnTo>
+                  <a:lnTo>
+                    <a:pt x="3437881" y="2675314"/>
+                  </a:lnTo>
+                  <a:lnTo>
+                    <a:pt x="3509503" y="2617773"/>
+                  </a:lnTo>
+                  <a:lnTo>
+                    <a:pt x="3581126" y="2556845"/>
+                  </a:lnTo>
+                  <a:lnTo>
+                    <a:pt x="3652748" y="2492328"/>
+                  </a:lnTo>
+                  <a:lnTo>
+                    <a:pt x="3724371" y="2424014"/>
+                  </a:lnTo>
+                  <a:lnTo>
+                    <a:pt x="3795993" y="2351677"/>
+                  </a:lnTo>
+                  <a:lnTo>
+                    <a:pt x="3867616" y="2275082"/>
+                  </a:lnTo>
+                  <a:lnTo>
+                    <a:pt x="3939238" y="2193977"/>
+                  </a:lnTo>
+                  <a:lnTo>
+                    <a:pt x="4010861" y="2108096"/>
+                  </a:lnTo>
+                  <a:lnTo>
+                    <a:pt x="4082483" y="2017160"/>
+                  </a:lnTo>
+                  <a:lnTo>
+                    <a:pt x="4154106" y="1920869"/>
+                  </a:lnTo>
+                  <a:lnTo>
+                    <a:pt x="4225729" y="1818909"/>
+                  </a:lnTo>
+                  <a:lnTo>
+                    <a:pt x="4297351" y="1710947"/>
+                  </a:lnTo>
+                  <a:lnTo>
+                    <a:pt x="4368974" y="1596628"/>
+                  </a:lnTo>
+                  <a:lnTo>
+                    <a:pt x="4440596" y="1475578"/>
+                  </a:lnTo>
+                  <a:lnTo>
+                    <a:pt x="4512219" y="1347401"/>
+                  </a:lnTo>
+                  <a:lnTo>
+                    <a:pt x="4583841" y="1211678"/>
+                  </a:lnTo>
+                  <a:lnTo>
+                    <a:pt x="4655464" y="1067964"/>
+                  </a:lnTo>
+                  <a:lnTo>
+                    <a:pt x="4727086" y="915789"/>
+                  </a:lnTo>
+                  <a:lnTo>
+                    <a:pt x="4798709" y="754654"/>
+                  </a:lnTo>
+                  <a:lnTo>
+                    <a:pt x="4870331" y="584032"/>
+                  </a:lnTo>
+                  <a:lnTo>
+                    <a:pt x="4941954" y="403365"/>
+                  </a:lnTo>
+                  <a:lnTo>
+                    <a:pt x="5013576" y="212061"/>
+                  </a:lnTo>
+                  <a:lnTo>
+                    <a:pt x="5085199" y="9494"/>
+                  </a:lnTo>
+                  <a:lnTo>
+                    <a:pt x="5088369" y="0"/>
                   </a:lnTo>
                   <a:lnTo>
                     <a:pt x="7090630" y="0"/>
                   </a:lnTo>
                   <a:lnTo>
-                    <a:pt x="7090630" y="3244908"/>
-                  </a:lnTo>
-                  <a:lnTo>
-                    <a:pt x="7019007" y="3239030"/>
-                  </a:lnTo>
-                  <a:lnTo>
-                    <a:pt x="6947385" y="3233067"/>
-                  </a:lnTo>
-                  <a:lnTo>
-                    <a:pt x="6875762" y="3227018"/>
-                  </a:lnTo>
-                  <a:lnTo>
-                    <a:pt x="6804139" y="3220882"/>
-                  </a:lnTo>
-                  <a:lnTo>
-                    <a:pt x="6732517" y="3214658"/>
-                  </a:lnTo>
-                  <a:lnTo>
-                    <a:pt x="6660894" y="3208344"/>
-                  </a:lnTo>
-                  <a:lnTo>
-                    <a:pt x="6589272" y="3201938"/>
-                  </a:lnTo>
-                  <a:lnTo>
-                    <a:pt x="6517649" y="3195441"/>
-                  </a:lnTo>
-                  <a:lnTo>
-                    <a:pt x="6446027" y="3188849"/>
-                  </a:lnTo>
-                  <a:lnTo>
-                    <a:pt x="6374404" y="3182163"/>
-                  </a:lnTo>
-                  <a:lnTo>
-                    <a:pt x="6302782" y="3175380"/>
-                  </a:lnTo>
-                  <a:lnTo>
-                    <a:pt x="6231159" y="3168500"/>
-                  </a:lnTo>
-                  <a:lnTo>
-                    <a:pt x="6159537" y="3161520"/>
-                  </a:lnTo>
-                  <a:lnTo>
-                    <a:pt x="6087914" y="3154440"/>
-                  </a:lnTo>
-                  <a:lnTo>
-                    <a:pt x="6016292" y="3147257"/>
-                  </a:lnTo>
-                  <a:lnTo>
-                    <a:pt x="5944669" y="3139971"/>
-                  </a:lnTo>
-                  <a:lnTo>
-                    <a:pt x="5873047" y="3132580"/>
-                  </a:lnTo>
-                  <a:lnTo>
-                    <a:pt x="5801424" y="3125083"/>
-                  </a:lnTo>
-                  <a:lnTo>
-                    <a:pt x="5729802" y="3117477"/>
-                  </a:lnTo>
-                  <a:lnTo>
-                    <a:pt x="5658179" y="3109762"/>
-                  </a:lnTo>
-                  <a:lnTo>
-                    <a:pt x="5586557" y="3101935"/>
-                  </a:lnTo>
-                  <a:lnTo>
-                    <a:pt x="5514934" y="3093996"/>
-                  </a:lnTo>
-                  <a:lnTo>
-                    <a:pt x="5443311" y="3085942"/>
-                  </a:lnTo>
-                  <a:lnTo>
-                    <a:pt x="5371689" y="3077772"/>
-                  </a:lnTo>
-                  <a:lnTo>
-                    <a:pt x="5300066" y="3069485"/>
-                  </a:lnTo>
-                  <a:lnTo>
-                    <a:pt x="5228444" y="3061077"/>
-                  </a:lnTo>
-                  <a:lnTo>
-                    <a:pt x="5156821" y="3052549"/>
-                  </a:lnTo>
-                  <a:lnTo>
-                    <a:pt x="5085199" y="3043898"/>
-                  </a:lnTo>
-                  <a:lnTo>
-                    <a:pt x="5013576" y="3035122"/>
-                  </a:lnTo>
-                  <a:lnTo>
-                    <a:pt x="4941954" y="3026219"/>
-                  </a:lnTo>
-                  <a:lnTo>
-                    <a:pt x="4870331" y="3017188"/>
-                  </a:lnTo>
-                  <a:lnTo>
-                    <a:pt x="4798709" y="3008027"/>
-                  </a:lnTo>
-                  <a:lnTo>
-                    <a:pt x="4727086" y="2998734"/>
-                  </a:lnTo>
-                  <a:lnTo>
-                    <a:pt x="4655464" y="2989307"/>
-                  </a:lnTo>
-                  <a:lnTo>
-                    <a:pt x="4583841" y="2979744"/>
-                  </a:lnTo>
-                  <a:lnTo>
-                    <a:pt x="4512219" y="2970043"/>
-                  </a:lnTo>
-                  <a:lnTo>
-                    <a:pt x="4440596" y="2960202"/>
-                  </a:lnTo>
-                  <a:lnTo>
-                    <a:pt x="4368974" y="2950219"/>
-                  </a:lnTo>
-                  <a:lnTo>
-                    <a:pt x="4297351" y="2940093"/>
-                  </a:lnTo>
-                  <a:lnTo>
-                    <a:pt x="4225729" y="2929820"/>
-                  </a:lnTo>
-                  <a:lnTo>
-                    <a:pt x="4154106" y="2919399"/>
-                  </a:lnTo>
-                  <a:lnTo>
-                    <a:pt x="4082483" y="2908828"/>
-                  </a:lnTo>
-                  <a:lnTo>
-                    <a:pt x="4010861" y="2898105"/>
-                  </a:lnTo>
-                  <a:lnTo>
-                    <a:pt x="3939238" y="2887227"/>
-                  </a:lnTo>
-                  <a:lnTo>
-                    <a:pt x="3867616" y="2876193"/>
-                  </a:lnTo>
-                  <a:lnTo>
-                    <a:pt x="3795993" y="2864999"/>
-                  </a:lnTo>
-                  <a:lnTo>
-                    <a:pt x="3724371" y="2853644"/>
-                  </a:lnTo>
-                  <a:lnTo>
-                    <a:pt x="3652748" y="2842125"/>
-                  </a:lnTo>
-                  <a:lnTo>
-                    <a:pt x="3581126" y="2830440"/>
-                  </a:lnTo>
-                  <a:lnTo>
-                    <a:pt x="3509503" y="2818586"/>
-                  </a:lnTo>
-                  <a:lnTo>
-                    <a:pt x="3437881" y="2806562"/>
-                  </a:lnTo>
-                  <a:lnTo>
-                    <a:pt x="3366258" y="2794364"/>
-                  </a:lnTo>
-                  <a:lnTo>
-                    <a:pt x="3294636" y="2786848"/>
-                  </a:lnTo>
-                  <a:lnTo>
-                    <a:pt x="3223013" y="2834927"/>
-                  </a:lnTo>
-                  <a:lnTo>
-                    <a:pt x="3151391" y="2880337"/>
-                  </a:lnTo>
-                  <a:lnTo>
-                    <a:pt x="3079768" y="2923224"/>
-                  </a:lnTo>
-                  <a:lnTo>
-                    <a:pt x="3008146" y="2963730"/>
-                  </a:lnTo>
-                  <a:lnTo>
-                    <a:pt x="2936523" y="3001987"/>
-                  </a:lnTo>
-                  <a:lnTo>
-                    <a:pt x="2864901" y="3038119"/>
-                  </a:lnTo>
-                  <a:lnTo>
-                    <a:pt x="2793278" y="3072245"/>
-                  </a:lnTo>
-                  <a:lnTo>
-                    <a:pt x="2721655" y="3104476"/>
-                  </a:lnTo>
-                  <a:lnTo>
-                    <a:pt x="2650033" y="3134916"/>
-                  </a:lnTo>
-                  <a:lnTo>
-                    <a:pt x="2578410" y="3163667"/>
-                  </a:lnTo>
-                  <a:lnTo>
-                    <a:pt x="2506788" y="3190821"/>
-                  </a:lnTo>
-                  <a:lnTo>
-                    <a:pt x="2435165" y="3216467"/>
-                  </a:lnTo>
-                  <a:lnTo>
-                    <a:pt x="2363543" y="3240688"/>
-                  </a:lnTo>
-                  <a:lnTo>
-                    <a:pt x="2291920" y="3263565"/>
-                  </a:lnTo>
-                  <a:lnTo>
-                    <a:pt x="2220298" y="3285171"/>
-                  </a:lnTo>
-                  <a:lnTo>
-                    <a:pt x="2148675" y="3305578"/>
-                  </a:lnTo>
-                  <a:lnTo>
-                    <a:pt x="2077053" y="3324851"/>
-                  </a:lnTo>
-                  <a:lnTo>
-                    <a:pt x="2005430" y="3343054"/>
-                  </a:lnTo>
-                  <a:lnTo>
-                    <a:pt x="1933808" y="3360246"/>
-                  </a:lnTo>
-                  <a:lnTo>
-                    <a:pt x="1862185" y="3376483"/>
-                  </a:lnTo>
-                  <a:lnTo>
-                    <a:pt x="1790563" y="3391819"/>
-                  </a:lnTo>
-                  <a:lnTo>
-                    <a:pt x="1718940" y="3406303"/>
-                  </a:lnTo>
-                  <a:lnTo>
-                    <a:pt x="1647318" y="3419983"/>
-                  </a:lnTo>
-                  <a:lnTo>
-                    <a:pt x="1575695" y="3432903"/>
-                  </a:lnTo>
-                  <a:lnTo>
-                    <a:pt x="1504073" y="3445106"/>
-                  </a:lnTo>
-                  <a:lnTo>
-                    <a:pt x="1432450" y="3456631"/>
-                  </a:lnTo>
-                  <a:lnTo>
-                    <a:pt x="1360827" y="3467516"/>
-                  </a:lnTo>
-                  <a:lnTo>
-                    <a:pt x="1289205" y="3477796"/>
-                  </a:lnTo>
-                  <a:lnTo>
-                    <a:pt x="1217582" y="3487506"/>
-                  </a:lnTo>
-                  <a:lnTo>
-                    <a:pt x="1145960" y="3496676"/>
-                  </a:lnTo>
-                  <a:lnTo>
-                    <a:pt x="1074337" y="3505337"/>
-                  </a:lnTo>
-                  <a:lnTo>
-                    <a:pt x="1002715" y="3513517"/>
-                  </a:lnTo>
-                  <a:lnTo>
-                    <a:pt x="931092" y="3521243"/>
-                  </a:lnTo>
-                  <a:lnTo>
-                    <a:pt x="859470" y="3528540"/>
-                  </a:lnTo>
-                  <a:lnTo>
-                    <a:pt x="787847" y="3535432"/>
-                  </a:lnTo>
-                  <a:lnTo>
-                    <a:pt x="716225" y="3541941"/>
-                  </a:lnTo>
-                  <a:lnTo>
-                    <a:pt x="644602" y="3548088"/>
-                  </a:lnTo>
-                  <a:lnTo>
-                    <a:pt x="572980" y="3553895"/>
-                  </a:lnTo>
-                  <a:lnTo>
-                    <a:pt x="501357" y="3559378"/>
-                  </a:lnTo>
-                  <a:lnTo>
-                    <a:pt x="429735" y="3564557"/>
-                  </a:lnTo>
-                  <a:lnTo>
-                    <a:pt x="358112" y="3569449"/>
-                  </a:lnTo>
-                  <a:lnTo>
-                    <a:pt x="286490" y="3574069"/>
-                  </a:lnTo>
-                  <a:lnTo>
-                    <a:pt x="214867" y="3578432"/>
-                  </a:lnTo>
-                  <a:lnTo>
-                    <a:pt x="143245" y="3582553"/>
-                  </a:lnTo>
-                  <a:lnTo>
-                    <a:pt x="71622" y="3586446"/>
-                  </a:lnTo>
-                  <a:lnTo>
-                    <a:pt x="0" y="3590122"/>
+                    <a:pt x="7090630" y="3246000"/>
+                  </a:lnTo>
+                  <a:lnTo>
+                    <a:pt x="7019007" y="3240130"/>
+                  </a:lnTo>
+                  <a:lnTo>
+                    <a:pt x="6947385" y="3234175"/>
+                  </a:lnTo>
+                  <a:lnTo>
+                    <a:pt x="6875762" y="3228134"/>
+                  </a:lnTo>
+                  <a:lnTo>
+                    <a:pt x="6804139" y="3222006"/>
+                  </a:lnTo>
+                  <a:lnTo>
+                    <a:pt x="6732517" y="3215790"/>
+                  </a:lnTo>
+                  <a:lnTo>
+                    <a:pt x="6660894" y="3209484"/>
+                  </a:lnTo>
+                  <a:lnTo>
+                    <a:pt x="6589272" y="3203086"/>
+                  </a:lnTo>
+                  <a:lnTo>
+                    <a:pt x="6517649" y="3196597"/>
+                  </a:lnTo>
+                  <a:lnTo>
+                    <a:pt x="6446027" y="3190014"/>
+                  </a:lnTo>
+                  <a:lnTo>
+                    <a:pt x="6374404" y="3183335"/>
+                  </a:lnTo>
+                  <a:lnTo>
+                    <a:pt x="6302782" y="3176561"/>
+                  </a:lnTo>
+                  <a:lnTo>
+                    <a:pt x="6231159" y="3169688"/>
+                  </a:lnTo>
+                  <a:lnTo>
+                    <a:pt x="6159537" y="3162716"/>
+                  </a:lnTo>
+                  <a:lnTo>
+                    <a:pt x="6087914" y="3155644"/>
+                  </a:lnTo>
+                  <a:lnTo>
+                    <a:pt x="6016292" y="3148470"/>
+                  </a:lnTo>
+                  <a:lnTo>
+                    <a:pt x="5944669" y="3141192"/>
+                  </a:lnTo>
+                  <a:lnTo>
+                    <a:pt x="5873047" y="3133808"/>
+                  </a:lnTo>
+                  <a:lnTo>
+                    <a:pt x="5801424" y="3126319"/>
+                  </a:lnTo>
+                  <a:lnTo>
+                    <a:pt x="5729802" y="3118721"/>
+                  </a:lnTo>
+                  <a:lnTo>
+                    <a:pt x="5658179" y="3111014"/>
+                  </a:lnTo>
+                  <a:lnTo>
+                    <a:pt x="5586557" y="3103195"/>
+                  </a:lnTo>
+                  <a:lnTo>
+                    <a:pt x="5514934" y="3095263"/>
+                  </a:lnTo>
+                  <a:lnTo>
+                    <a:pt x="5443311" y="3087217"/>
+                  </a:lnTo>
+                  <a:lnTo>
+                    <a:pt x="5371689" y="3079055"/>
+                  </a:lnTo>
+                  <a:lnTo>
+                    <a:pt x="5300066" y="3070775"/>
+                  </a:lnTo>
+                  <a:lnTo>
+                    <a:pt x="5228444" y="3062375"/>
+                  </a:lnTo>
+                  <a:lnTo>
+                    <a:pt x="5156821" y="3053855"/>
+                  </a:lnTo>
+                  <a:lnTo>
+                    <a:pt x="5085199" y="3045211"/>
+                  </a:lnTo>
+                  <a:lnTo>
+                    <a:pt x="5013576" y="3036442"/>
+                  </a:lnTo>
+                  <a:lnTo>
+                    <a:pt x="4941954" y="3027547"/>
+                  </a:lnTo>
+                  <a:lnTo>
+                    <a:pt x="4870331" y="3018523"/>
+                  </a:lnTo>
+                  <a:lnTo>
+                    <a:pt x="4798709" y="3009369"/>
+                  </a:lnTo>
+                  <a:lnTo>
+                    <a:pt x="4727086" y="3000083"/>
+                  </a:lnTo>
+                  <a:lnTo>
+                    <a:pt x="4655464" y="2990663"/>
+                  </a:lnTo>
+                  <a:lnTo>
+                    <a:pt x="4583841" y="2981107"/>
+                  </a:lnTo>
+                  <a:lnTo>
+                    <a:pt x="4512219" y="2971413"/>
+                  </a:lnTo>
+                  <a:lnTo>
+                    <a:pt x="4440596" y="2961580"/>
+                  </a:lnTo>
+                  <a:lnTo>
+                    <a:pt x="4368974" y="2951604"/>
+                  </a:lnTo>
+                  <a:lnTo>
+                    <a:pt x="4297351" y="2941484"/>
+                  </a:lnTo>
+                  <a:lnTo>
+                    <a:pt x="4225729" y="2931218"/>
+                  </a:lnTo>
+                  <a:lnTo>
+                    <a:pt x="4154106" y="2920804"/>
+                  </a:lnTo>
+                  <a:lnTo>
+                    <a:pt x="4082483" y="2910239"/>
+                  </a:lnTo>
+                  <a:lnTo>
+                    <a:pt x="4010861" y="2899522"/>
+                  </a:lnTo>
+                  <a:lnTo>
+                    <a:pt x="3939238" y="2888650"/>
+                  </a:lnTo>
+                  <a:lnTo>
+                    <a:pt x="3867616" y="2877622"/>
+                  </a:lnTo>
+                  <a:lnTo>
+                    <a:pt x="3795993" y="2866434"/>
+                  </a:lnTo>
+                  <a:lnTo>
+                    <a:pt x="3724371" y="2855085"/>
+                  </a:lnTo>
+                  <a:lnTo>
+                    <a:pt x="3652748" y="2843571"/>
+                  </a:lnTo>
+                  <a:lnTo>
+                    <a:pt x="3581126" y="2831892"/>
+                  </a:lnTo>
+                  <a:lnTo>
+                    <a:pt x="3509503" y="2820044"/>
+                  </a:lnTo>
+                  <a:lnTo>
+                    <a:pt x="3437881" y="2808025"/>
+                  </a:lnTo>
+                  <a:lnTo>
+                    <a:pt x="3366258" y="2795833"/>
+                  </a:lnTo>
+                  <a:lnTo>
+                    <a:pt x="3294636" y="2783464"/>
+                  </a:lnTo>
+                  <a:lnTo>
+                    <a:pt x="3223013" y="2829443"/>
+                  </a:lnTo>
+                  <a:lnTo>
+                    <a:pt x="3151391" y="2875215"/>
+                  </a:lnTo>
+                  <a:lnTo>
+                    <a:pt x="3079768" y="2918442"/>
+                  </a:lnTo>
+                  <a:lnTo>
+                    <a:pt x="3008146" y="2959265"/>
+                  </a:lnTo>
+                  <a:lnTo>
+                    <a:pt x="2936523" y="2997818"/>
+                  </a:lnTo>
+                  <a:lnTo>
+                    <a:pt x="2864901" y="3034228"/>
+                  </a:lnTo>
+                  <a:lnTo>
+                    <a:pt x="2793278" y="3068613"/>
+                  </a:lnTo>
+                  <a:lnTo>
+                    <a:pt x="2721655" y="3101087"/>
+                  </a:lnTo>
+                  <a:lnTo>
+                    <a:pt x="2650033" y="3131754"/>
+                  </a:lnTo>
+                  <a:lnTo>
+                    <a:pt x="2578410" y="3160717"/>
+                  </a:lnTo>
+                  <a:lnTo>
+                    <a:pt x="2506788" y="3188069"/>
+                  </a:lnTo>
+                  <a:lnTo>
+                    <a:pt x="2435165" y="3213901"/>
+                  </a:lnTo>
+                  <a:lnTo>
+                    <a:pt x="2363543" y="3238296"/>
+                  </a:lnTo>
+                  <a:lnTo>
+                    <a:pt x="2291920" y="3261334"/>
+                  </a:lnTo>
+                  <a:lnTo>
+                    <a:pt x="2220298" y="3283092"/>
+                  </a:lnTo>
+                  <a:lnTo>
+                    <a:pt x="2148675" y="3303640"/>
+                  </a:lnTo>
+                  <a:lnTo>
+                    <a:pt x="2077053" y="3323045"/>
+                  </a:lnTo>
+                  <a:lnTo>
+                    <a:pt x="2005430" y="3341372"/>
+                  </a:lnTo>
+                  <a:lnTo>
+                    <a:pt x="1933808" y="3358679"/>
+                  </a:lnTo>
+                  <a:lnTo>
+                    <a:pt x="1862185" y="3375024"/>
+                  </a:lnTo>
+                  <a:lnTo>
+                    <a:pt x="1790563" y="3390460"/>
+                  </a:lnTo>
+                  <a:lnTo>
+                    <a:pt x="1718940" y="3405038"/>
+                  </a:lnTo>
+                  <a:lnTo>
+                    <a:pt x="1647318" y="3418806"/>
+                  </a:lnTo>
+                  <a:lnTo>
+                    <a:pt x="1575695" y="3431808"/>
+                  </a:lnTo>
+                  <a:lnTo>
+                    <a:pt x="1504073" y="3444087"/>
+                  </a:lnTo>
+                  <a:lnTo>
+                    <a:pt x="1432450" y="3455683"/>
+                  </a:lnTo>
+                  <a:lnTo>
+                    <a:pt x="1360827" y="3466634"/>
+                  </a:lnTo>
+                  <a:lnTo>
+                    <a:pt x="1289205" y="3476977"/>
+                  </a:lnTo>
+                  <a:lnTo>
+                    <a:pt x="1217582" y="3486744"/>
+                  </a:lnTo>
+                  <a:lnTo>
+                    <a:pt x="1145960" y="3495969"/>
+                  </a:lnTo>
+                  <a:lnTo>
+                    <a:pt x="1074337" y="3504680"/>
+                  </a:lnTo>
+                  <a:lnTo>
+                    <a:pt x="1002715" y="3512907"/>
+                  </a:lnTo>
+                  <a:lnTo>
+                    <a:pt x="931092" y="3520677"/>
+                  </a:lnTo>
+                  <a:lnTo>
+                    <a:pt x="859470" y="3528014"/>
+                  </a:lnTo>
+                  <a:lnTo>
+                    <a:pt x="787847" y="3534944"/>
+                  </a:lnTo>
+                  <a:lnTo>
+                    <a:pt x="716225" y="3541488"/>
+                  </a:lnTo>
+                  <a:lnTo>
+                    <a:pt x="644602" y="3547669"/>
+                  </a:lnTo>
+                  <a:lnTo>
+                    <a:pt x="572980" y="3553506"/>
+                  </a:lnTo>
+                  <a:lnTo>
+                    <a:pt x="501357" y="3559018"/>
+                  </a:lnTo>
+                  <a:lnTo>
+                    <a:pt x="429735" y="3564224"/>
+                  </a:lnTo>
+                  <a:lnTo>
+                    <a:pt x="358112" y="3569140"/>
+                  </a:lnTo>
+                  <a:lnTo>
+                    <a:pt x="286490" y="3573783"/>
+                  </a:lnTo>
+                  <a:lnTo>
+                    <a:pt x="214867" y="3578168"/>
+                  </a:lnTo>
+                  <a:lnTo>
+                    <a:pt x="143245" y="3582309"/>
+                  </a:lnTo>
+                  <a:lnTo>
+                    <a:pt x="71622" y="3586220"/>
+                  </a:lnTo>
+                  <a:lnTo>
+                    <a:pt x="0" y="3589913"/>
                   </a:lnTo>
                   <a:close/>
                 </a:path>
@@ -3513,230 +3513,230 @@
           <p:spPr>
             <a:xfrm>
               <a:off x="1172049" y="1896563"/>
-              <a:ext cx="5098946" cy="2781991"/>
+              <a:ext cx="5088369" cy="2780976"/>
             </a:xfrm>
             <a:custGeom>
               <a:avLst/>
               <a:pathLst>
-                <a:path w="5098946" h="2781991">
+                <a:path w="5088369" h="2780976">
                   <a:moveTo>
-                    <a:pt x="0" y="1970755"/>
+                    <a:pt x="0" y="1972160"/>
                   </a:moveTo>
                   <a:lnTo>
-                    <a:pt x="71622" y="1994658"/>
-                  </a:lnTo>
-                  <a:lnTo>
-                    <a:pt x="143245" y="2018221"/>
-                  </a:lnTo>
-                  <a:lnTo>
-                    <a:pt x="214867" y="2041449"/>
-                  </a:lnTo>
-                  <a:lnTo>
-                    <a:pt x="286490" y="2064346"/>
-                  </a:lnTo>
-                  <a:lnTo>
-                    <a:pt x="358112" y="2086919"/>
-                  </a:lnTo>
-                  <a:lnTo>
-                    <a:pt x="429735" y="2109171"/>
-                  </a:lnTo>
-                  <a:lnTo>
-                    <a:pt x="501357" y="2131106"/>
-                  </a:lnTo>
-                  <a:lnTo>
-                    <a:pt x="572980" y="2152730"/>
-                  </a:lnTo>
-                  <a:lnTo>
-                    <a:pt x="644602" y="2174046"/>
-                  </a:lnTo>
-                  <a:lnTo>
-                    <a:pt x="716225" y="2195059"/>
-                  </a:lnTo>
-                  <a:lnTo>
-                    <a:pt x="787847" y="2215774"/>
-                  </a:lnTo>
-                  <a:lnTo>
-                    <a:pt x="859470" y="2236195"/>
-                  </a:lnTo>
-                  <a:lnTo>
-                    <a:pt x="931092" y="2256325"/>
-                  </a:lnTo>
-                  <a:lnTo>
-                    <a:pt x="1002715" y="2276169"/>
-                  </a:lnTo>
-                  <a:lnTo>
-                    <a:pt x="1074337" y="2295731"/>
-                  </a:lnTo>
-                  <a:lnTo>
-                    <a:pt x="1145960" y="2315015"/>
-                  </a:lnTo>
-                  <a:lnTo>
-                    <a:pt x="1217582" y="2334025"/>
-                  </a:lnTo>
-                  <a:lnTo>
-                    <a:pt x="1289205" y="2352765"/>
-                  </a:lnTo>
-                  <a:lnTo>
-                    <a:pt x="1360827" y="2371239"/>
-                  </a:lnTo>
-                  <a:lnTo>
-                    <a:pt x="1432450" y="2389449"/>
-                  </a:lnTo>
-                  <a:lnTo>
-                    <a:pt x="1504073" y="2407402"/>
-                  </a:lnTo>
-                  <a:lnTo>
-                    <a:pt x="1575695" y="2425099"/>
-                  </a:lnTo>
-                  <a:lnTo>
-                    <a:pt x="1647318" y="2442544"/>
-                  </a:lnTo>
-                  <a:lnTo>
-                    <a:pt x="1718940" y="2459742"/>
-                  </a:lnTo>
-                  <a:lnTo>
-                    <a:pt x="1790563" y="2476695"/>
-                  </a:lnTo>
-                  <a:lnTo>
-                    <a:pt x="1862185" y="2493407"/>
-                  </a:lnTo>
-                  <a:lnTo>
-                    <a:pt x="1933808" y="2509882"/>
-                  </a:lnTo>
-                  <a:lnTo>
-                    <a:pt x="2005430" y="2526123"/>
-                  </a:lnTo>
-                  <a:lnTo>
-                    <a:pt x="2077053" y="2542132"/>
-                  </a:lnTo>
-                  <a:lnTo>
-                    <a:pt x="2148675" y="2557915"/>
-                  </a:lnTo>
-                  <a:lnTo>
-                    <a:pt x="2220298" y="2573473"/>
-                  </a:lnTo>
-                  <a:lnTo>
-                    <a:pt x="2291920" y="2588810"/>
-                  </a:lnTo>
-                  <a:lnTo>
-                    <a:pt x="2363543" y="2603929"/>
-                  </a:lnTo>
-                  <a:lnTo>
-                    <a:pt x="2435165" y="2618833"/>
-                  </a:lnTo>
-                  <a:lnTo>
-                    <a:pt x="2506788" y="2633525"/>
-                  </a:lnTo>
-                  <a:lnTo>
-                    <a:pt x="2578410" y="2648008"/>
-                  </a:lnTo>
-                  <a:lnTo>
-                    <a:pt x="2650033" y="2662286"/>
-                  </a:lnTo>
-                  <a:lnTo>
-                    <a:pt x="2721655" y="2676361"/>
-                  </a:lnTo>
-                  <a:lnTo>
-                    <a:pt x="2793278" y="2690235"/>
-                  </a:lnTo>
-                  <a:lnTo>
-                    <a:pt x="2864901" y="2703913"/>
-                  </a:lnTo>
-                  <a:lnTo>
-                    <a:pt x="2936523" y="2717396"/>
-                  </a:lnTo>
-                  <a:lnTo>
-                    <a:pt x="3008146" y="2730687"/>
-                  </a:lnTo>
-                  <a:lnTo>
-                    <a:pt x="3079768" y="2743790"/>
-                  </a:lnTo>
-                  <a:lnTo>
-                    <a:pt x="3151391" y="2756706"/>
-                  </a:lnTo>
-                  <a:lnTo>
-                    <a:pt x="3223013" y="2769439"/>
-                  </a:lnTo>
-                  <a:lnTo>
-                    <a:pt x="3294636" y="2781991"/>
-                  </a:lnTo>
-                  <a:lnTo>
-                    <a:pt x="3366258" y="2735942"/>
-                  </a:lnTo>
-                  <a:lnTo>
-                    <a:pt x="3437881" y="2682042"/>
-                  </a:lnTo>
-                  <a:lnTo>
-                    <a:pt x="3509503" y="2624974"/>
-                  </a:lnTo>
-                  <a:lnTo>
-                    <a:pt x="3581126" y="2564550"/>
-                  </a:lnTo>
-                  <a:lnTo>
-                    <a:pt x="3652748" y="2500573"/>
-                  </a:lnTo>
-                  <a:lnTo>
-                    <a:pt x="3724371" y="2432835"/>
-                  </a:lnTo>
-                  <a:lnTo>
-                    <a:pt x="3795993" y="2361114"/>
-                  </a:lnTo>
-                  <a:lnTo>
-                    <a:pt x="3867616" y="2285175"/>
-                  </a:lnTo>
-                  <a:lnTo>
-                    <a:pt x="3939238" y="2204772"/>
-                  </a:lnTo>
-                  <a:lnTo>
-                    <a:pt x="4010861" y="2119642"/>
-                  </a:lnTo>
-                  <a:lnTo>
-                    <a:pt x="4082483" y="2029506"/>
-                  </a:lnTo>
-                  <a:lnTo>
-                    <a:pt x="4154106" y="1934070"/>
-                  </a:lnTo>
-                  <a:lnTo>
-                    <a:pt x="4225729" y="1833023"/>
-                  </a:lnTo>
-                  <a:lnTo>
-                    <a:pt x="4297351" y="1726035"/>
-                  </a:lnTo>
-                  <a:lnTo>
-                    <a:pt x="4368974" y="1612756"/>
-                  </a:lnTo>
-                  <a:lnTo>
-                    <a:pt x="4440596" y="1492816"/>
-                  </a:lnTo>
-                  <a:lnTo>
-                    <a:pt x="4512219" y="1365825"/>
-                  </a:lnTo>
-                  <a:lnTo>
-                    <a:pt x="4583841" y="1231367"/>
-                  </a:lnTo>
-                  <a:lnTo>
-                    <a:pt x="4655464" y="1089003"/>
-                  </a:lnTo>
-                  <a:lnTo>
-                    <a:pt x="4727086" y="938268"/>
-                  </a:lnTo>
-                  <a:lnTo>
-                    <a:pt x="4798709" y="778671"/>
-                  </a:lnTo>
-                  <a:lnTo>
-                    <a:pt x="4870331" y="609690"/>
-                  </a:lnTo>
-                  <a:lnTo>
-                    <a:pt x="4941954" y="430773"/>
-                  </a:lnTo>
-                  <a:lnTo>
-                    <a:pt x="5013576" y="241336"/>
-                  </a:lnTo>
-                  <a:lnTo>
-                    <a:pt x="5085199" y="40761"/>
-                  </a:lnTo>
-                  <a:lnTo>
-                    <a:pt x="5098946" y="0"/>
+                    <a:pt x="71622" y="1996074"/>
+                  </a:lnTo>
+                  <a:lnTo>
+                    <a:pt x="143245" y="2019647"/>
+                  </a:lnTo>
+                  <a:lnTo>
+                    <a:pt x="214867" y="2042885"/>
+                  </a:lnTo>
+                  <a:lnTo>
+                    <a:pt x="286490" y="2065792"/>
+                  </a:lnTo>
+                  <a:lnTo>
+                    <a:pt x="358112" y="2088373"/>
+                  </a:lnTo>
+                  <a:lnTo>
+                    <a:pt x="429735" y="2110632"/>
+                  </a:lnTo>
+                  <a:lnTo>
+                    <a:pt x="501357" y="2132575"/>
+                  </a:lnTo>
+                  <a:lnTo>
+                    <a:pt x="572980" y="2154206"/>
+                  </a:lnTo>
+                  <a:lnTo>
+                    <a:pt x="644602" y="2175529"/>
+                  </a:lnTo>
+                  <a:lnTo>
+                    <a:pt x="716225" y="2196549"/>
+                  </a:lnTo>
+                  <a:lnTo>
+                    <a:pt x="787847" y="2217269"/>
+                  </a:lnTo>
+                  <a:lnTo>
+                    <a:pt x="859470" y="2237695"/>
+                  </a:lnTo>
+                  <a:lnTo>
+                    <a:pt x="931092" y="2257829"/>
+                  </a:lnTo>
+                  <a:lnTo>
+                    <a:pt x="1002715" y="2277678"/>
+                  </a:lnTo>
+                  <a:lnTo>
+                    <a:pt x="1074337" y="2297244"/>
+                  </a:lnTo>
+                  <a:lnTo>
+                    <a:pt x="1145960" y="2316531"/>
+                  </a:lnTo>
+                  <a:lnTo>
+                    <a:pt x="1217582" y="2335544"/>
+                  </a:lnTo>
+                  <a:lnTo>
+                    <a:pt x="1289205" y="2354287"/>
+                  </a:lnTo>
+                  <a:lnTo>
+                    <a:pt x="1360827" y="2372762"/>
+                  </a:lnTo>
+                  <a:lnTo>
+                    <a:pt x="1432450" y="2390975"/>
+                  </a:lnTo>
+                  <a:lnTo>
+                    <a:pt x="1504073" y="2408929"/>
+                  </a:lnTo>
+                  <a:lnTo>
+                    <a:pt x="1575695" y="2426627"/>
+                  </a:lnTo>
+                  <a:lnTo>
+                    <a:pt x="1647318" y="2444073"/>
+                  </a:lnTo>
+                  <a:lnTo>
+                    <a:pt x="1718940" y="2461272"/>
+                  </a:lnTo>
+                  <a:lnTo>
+                    <a:pt x="1790563" y="2478225"/>
+                  </a:lnTo>
+                  <a:lnTo>
+                    <a:pt x="1862185" y="2494937"/>
+                  </a:lnTo>
+                  <a:lnTo>
+                    <a:pt x="1933808" y="2511411"/>
+                  </a:lnTo>
+                  <a:lnTo>
+                    <a:pt x="2005430" y="2527651"/>
+                  </a:lnTo>
+                  <a:lnTo>
+                    <a:pt x="2077053" y="2543660"/>
+                  </a:lnTo>
+                  <a:lnTo>
+                    <a:pt x="2148675" y="2559441"/>
+                  </a:lnTo>
+                  <a:lnTo>
+                    <a:pt x="2220298" y="2574997"/>
+                  </a:lnTo>
+                  <a:lnTo>
+                    <a:pt x="2291920" y="2590332"/>
+                  </a:lnTo>
+                  <a:lnTo>
+                    <a:pt x="2363543" y="2605449"/>
+                  </a:lnTo>
+                  <a:lnTo>
+                    <a:pt x="2435165" y="2620351"/>
+                  </a:lnTo>
+                  <a:lnTo>
+                    <a:pt x="2506788" y="2635040"/>
+                  </a:lnTo>
+                  <a:lnTo>
+                    <a:pt x="2578410" y="2649521"/>
+                  </a:lnTo>
+                  <a:lnTo>
+                    <a:pt x="2650033" y="2663796"/>
+                  </a:lnTo>
+                  <a:lnTo>
+                    <a:pt x="2721655" y="2677867"/>
+                  </a:lnTo>
+                  <a:lnTo>
+                    <a:pt x="2793278" y="2691738"/>
+                  </a:lnTo>
+                  <a:lnTo>
+                    <a:pt x="2864901" y="2705412"/>
+                  </a:lnTo>
+                  <a:lnTo>
+                    <a:pt x="2936523" y="2718891"/>
+                  </a:lnTo>
+                  <a:lnTo>
+                    <a:pt x="3008146" y="2732179"/>
+                  </a:lnTo>
+                  <a:lnTo>
+                    <a:pt x="3079768" y="2745277"/>
+                  </a:lnTo>
+                  <a:lnTo>
+                    <a:pt x="3151391" y="2758189"/>
+                  </a:lnTo>
+                  <a:lnTo>
+                    <a:pt x="3223013" y="2770917"/>
+                  </a:lnTo>
+                  <a:lnTo>
+                    <a:pt x="3294636" y="2780976"/>
+                  </a:lnTo>
+                  <a:lnTo>
+                    <a:pt x="3366258" y="2729656"/>
+                  </a:lnTo>
+                  <a:lnTo>
+                    <a:pt x="3437881" y="2675314"/>
+                  </a:lnTo>
+                  <a:lnTo>
+                    <a:pt x="3509503" y="2617773"/>
+                  </a:lnTo>
+                  <a:lnTo>
+                    <a:pt x="3581126" y="2556845"/>
+                  </a:lnTo>
+                  <a:lnTo>
+                    <a:pt x="3652748" y="2492328"/>
+                  </a:lnTo>
+                  <a:lnTo>
+                    <a:pt x="3724371" y="2424014"/>
+                  </a:lnTo>
+                  <a:lnTo>
+                    <a:pt x="3795993" y="2351677"/>
+                  </a:lnTo>
+                  <a:lnTo>
+                    <a:pt x="3867616" y="2275082"/>
+                  </a:lnTo>
+                  <a:lnTo>
+                    <a:pt x="3939238" y="2193977"/>
+                  </a:lnTo>
+                  <a:lnTo>
+                    <a:pt x="4010861" y="2108096"/>
+                  </a:lnTo>
+                  <a:lnTo>
+                    <a:pt x="4082483" y="2017160"/>
+                  </a:lnTo>
+                  <a:lnTo>
+                    <a:pt x="4154106" y="1920869"/>
+                  </a:lnTo>
+                  <a:lnTo>
+                    <a:pt x="4225729" y="1818909"/>
+                  </a:lnTo>
+                  <a:lnTo>
+                    <a:pt x="4297351" y="1710947"/>
+                  </a:lnTo>
+                  <a:lnTo>
+                    <a:pt x="4368974" y="1596628"/>
+                  </a:lnTo>
+                  <a:lnTo>
+                    <a:pt x="4440596" y="1475578"/>
+                  </a:lnTo>
+                  <a:lnTo>
+                    <a:pt x="4512219" y="1347401"/>
+                  </a:lnTo>
+                  <a:lnTo>
+                    <a:pt x="4583841" y="1211678"/>
+                  </a:lnTo>
+                  <a:lnTo>
+                    <a:pt x="4655464" y="1067964"/>
+                  </a:lnTo>
+                  <a:lnTo>
+                    <a:pt x="4727086" y="915789"/>
+                  </a:lnTo>
+                  <a:lnTo>
+                    <a:pt x="4798709" y="754654"/>
+                  </a:lnTo>
+                  <a:lnTo>
+                    <a:pt x="4870331" y="584032"/>
+                  </a:lnTo>
+                  <a:lnTo>
+                    <a:pt x="4941954" y="403365"/>
+                  </a:lnTo>
+                  <a:lnTo>
+                    <a:pt x="5013576" y="212061"/>
+                  </a:lnTo>
+                  <a:lnTo>
+                    <a:pt x="5085199" y="9494"/>
+                  </a:lnTo>
+                  <a:lnTo>
+                    <a:pt x="5088369" y="0"/>
                   </a:lnTo>
                 </a:path>
               </a:pathLst>
@@ -3756,312 +3756,312 @@
           </p:nvSpPr>
           <p:spPr>
             <a:xfrm>
-              <a:off x="1172049" y="4683411"/>
-              <a:ext cx="7090630" cy="803273"/>
+              <a:off x="1172049" y="4680027"/>
+              <a:ext cx="7090630" cy="806448"/>
             </a:xfrm>
             <a:custGeom>
               <a:avLst/>
               <a:pathLst>
-                <a:path w="7090630" h="803273">
+                <a:path w="7090630" h="806448">
                   <a:moveTo>
-                    <a:pt x="7090630" y="458060"/>
+                    <a:pt x="7090630" y="462536"/>
                   </a:moveTo>
                   <a:lnTo>
-                    <a:pt x="7019007" y="452182"/>
-                  </a:lnTo>
-                  <a:lnTo>
-                    <a:pt x="6947385" y="446219"/>
-                  </a:lnTo>
-                  <a:lnTo>
-                    <a:pt x="6875762" y="440170"/>
-                  </a:lnTo>
-                  <a:lnTo>
-                    <a:pt x="6804139" y="434034"/>
-                  </a:lnTo>
-                  <a:lnTo>
-                    <a:pt x="6732517" y="427810"/>
-                  </a:lnTo>
-                  <a:lnTo>
-                    <a:pt x="6660894" y="421495"/>
-                  </a:lnTo>
-                  <a:lnTo>
-                    <a:pt x="6589272" y="415090"/>
-                  </a:lnTo>
-                  <a:lnTo>
-                    <a:pt x="6517649" y="408592"/>
-                  </a:lnTo>
-                  <a:lnTo>
-                    <a:pt x="6446027" y="402001"/>
-                  </a:lnTo>
-                  <a:lnTo>
-                    <a:pt x="6374404" y="395315"/>
-                  </a:lnTo>
-                  <a:lnTo>
-                    <a:pt x="6302782" y="388532"/>
-                  </a:lnTo>
-                  <a:lnTo>
-                    <a:pt x="6231159" y="381651"/>
-                  </a:lnTo>
-                  <a:lnTo>
-                    <a:pt x="6159537" y="374672"/>
-                  </a:lnTo>
-                  <a:lnTo>
-                    <a:pt x="6087914" y="367591"/>
-                  </a:lnTo>
-                  <a:lnTo>
-                    <a:pt x="6016292" y="360409"/>
-                  </a:lnTo>
-                  <a:lnTo>
-                    <a:pt x="5944669" y="353123"/>
-                  </a:lnTo>
-                  <a:lnTo>
-                    <a:pt x="5873047" y="345732"/>
-                  </a:lnTo>
-                  <a:lnTo>
-                    <a:pt x="5801424" y="338234"/>
-                  </a:lnTo>
-                  <a:lnTo>
-                    <a:pt x="5729802" y="330629"/>
-                  </a:lnTo>
-                  <a:lnTo>
-                    <a:pt x="5658179" y="322913"/>
-                  </a:lnTo>
-                  <a:lnTo>
-                    <a:pt x="5586557" y="315087"/>
-                  </a:lnTo>
-                  <a:lnTo>
-                    <a:pt x="5514934" y="307148"/>
-                  </a:lnTo>
-                  <a:lnTo>
-                    <a:pt x="5443311" y="299094"/>
-                  </a:lnTo>
-                  <a:lnTo>
-                    <a:pt x="5371689" y="290924"/>
-                  </a:lnTo>
-                  <a:lnTo>
-                    <a:pt x="5300066" y="282636"/>
-                  </a:lnTo>
-                  <a:lnTo>
-                    <a:pt x="5228444" y="274229"/>
-                  </a:lnTo>
-                  <a:lnTo>
-                    <a:pt x="5156821" y="265701"/>
-                  </a:lnTo>
-                  <a:lnTo>
-                    <a:pt x="5085199" y="257049"/>
-                  </a:lnTo>
-                  <a:lnTo>
-                    <a:pt x="5013576" y="248273"/>
-                  </a:lnTo>
-                  <a:lnTo>
-                    <a:pt x="4941954" y="239371"/>
-                  </a:lnTo>
-                  <a:lnTo>
-                    <a:pt x="4870331" y="230340"/>
-                  </a:lnTo>
-                  <a:lnTo>
-                    <a:pt x="4798709" y="221179"/>
-                  </a:lnTo>
-                  <a:lnTo>
-                    <a:pt x="4727086" y="211885"/>
-                  </a:lnTo>
-                  <a:lnTo>
-                    <a:pt x="4655464" y="202458"/>
-                  </a:lnTo>
-                  <a:lnTo>
-                    <a:pt x="4583841" y="192895"/>
-                  </a:lnTo>
-                  <a:lnTo>
-                    <a:pt x="4512219" y="183194"/>
-                  </a:lnTo>
-                  <a:lnTo>
-                    <a:pt x="4440596" y="173354"/>
-                  </a:lnTo>
-                  <a:lnTo>
-                    <a:pt x="4368974" y="163371"/>
-                  </a:lnTo>
-                  <a:lnTo>
-                    <a:pt x="4297351" y="153244"/>
-                  </a:lnTo>
-                  <a:lnTo>
-                    <a:pt x="4225729" y="142972"/>
-                  </a:lnTo>
-                  <a:lnTo>
-                    <a:pt x="4154106" y="132551"/>
-                  </a:lnTo>
-                  <a:lnTo>
-                    <a:pt x="4082483" y="121980"/>
-                  </a:lnTo>
-                  <a:lnTo>
-                    <a:pt x="4010861" y="111257"/>
-                  </a:lnTo>
-                  <a:lnTo>
-                    <a:pt x="3939238" y="100379"/>
-                  </a:lnTo>
-                  <a:lnTo>
-                    <a:pt x="3867616" y="89344"/>
-                  </a:lnTo>
-                  <a:lnTo>
-                    <a:pt x="3795993" y="78150"/>
-                  </a:lnTo>
-                  <a:lnTo>
-                    <a:pt x="3724371" y="66795"/>
-                  </a:lnTo>
-                  <a:lnTo>
-                    <a:pt x="3652748" y="55276"/>
-                  </a:lnTo>
-                  <a:lnTo>
-                    <a:pt x="3581126" y="43591"/>
-                  </a:lnTo>
-                  <a:lnTo>
-                    <a:pt x="3509503" y="31738"/>
-                  </a:lnTo>
-                  <a:lnTo>
-                    <a:pt x="3437881" y="19714"/>
-                  </a:lnTo>
-                  <a:lnTo>
-                    <a:pt x="3366258" y="7516"/>
+                    <a:pt x="7019007" y="456666"/>
+                  </a:lnTo>
+                  <a:lnTo>
+                    <a:pt x="6947385" y="450711"/>
+                  </a:lnTo>
+                  <a:lnTo>
+                    <a:pt x="6875762" y="444670"/>
+                  </a:lnTo>
+                  <a:lnTo>
+                    <a:pt x="6804139" y="438542"/>
+                  </a:lnTo>
+                  <a:lnTo>
+                    <a:pt x="6732517" y="432325"/>
+                  </a:lnTo>
+                  <a:lnTo>
+                    <a:pt x="6660894" y="426019"/>
+                  </a:lnTo>
+                  <a:lnTo>
+                    <a:pt x="6589272" y="419622"/>
+                  </a:lnTo>
+                  <a:lnTo>
+                    <a:pt x="6517649" y="413132"/>
+                  </a:lnTo>
+                  <a:lnTo>
+                    <a:pt x="6446027" y="406549"/>
+                  </a:lnTo>
+                  <a:lnTo>
+                    <a:pt x="6374404" y="399871"/>
+                  </a:lnTo>
+                  <a:lnTo>
+                    <a:pt x="6302782" y="393096"/>
+                  </a:lnTo>
+                  <a:lnTo>
+                    <a:pt x="6231159" y="386224"/>
+                  </a:lnTo>
+                  <a:lnTo>
+                    <a:pt x="6159537" y="379252"/>
+                  </a:lnTo>
+                  <a:lnTo>
+                    <a:pt x="6087914" y="372180"/>
+                  </a:lnTo>
+                  <a:lnTo>
+                    <a:pt x="6016292" y="365005"/>
+                  </a:lnTo>
+                  <a:lnTo>
+                    <a:pt x="5944669" y="357727"/>
+                  </a:lnTo>
+                  <a:lnTo>
+                    <a:pt x="5873047" y="350344"/>
+                  </a:lnTo>
+                  <a:lnTo>
+                    <a:pt x="5801424" y="342854"/>
+                  </a:lnTo>
+                  <a:lnTo>
+                    <a:pt x="5729802" y="335257"/>
+                  </a:lnTo>
+                  <a:lnTo>
+                    <a:pt x="5658179" y="327549"/>
+                  </a:lnTo>
+                  <a:lnTo>
+                    <a:pt x="5586557" y="319730"/>
+                  </a:lnTo>
+                  <a:lnTo>
+                    <a:pt x="5514934" y="311799"/>
+                  </a:lnTo>
+                  <a:lnTo>
+                    <a:pt x="5443311" y="303753"/>
+                  </a:lnTo>
+                  <a:lnTo>
+                    <a:pt x="5371689" y="295591"/>
+                  </a:lnTo>
+                  <a:lnTo>
+                    <a:pt x="5300066" y="287310"/>
+                  </a:lnTo>
+                  <a:lnTo>
+                    <a:pt x="5228444" y="278911"/>
+                  </a:lnTo>
+                  <a:lnTo>
+                    <a:pt x="5156821" y="270390"/>
+                  </a:lnTo>
+                  <a:lnTo>
+                    <a:pt x="5085199" y="261746"/>
+                  </a:lnTo>
+                  <a:lnTo>
+                    <a:pt x="5013576" y="252978"/>
+                  </a:lnTo>
+                  <a:lnTo>
+                    <a:pt x="4941954" y="244082"/>
+                  </a:lnTo>
+                  <a:lnTo>
+                    <a:pt x="4870331" y="235059"/>
+                  </a:lnTo>
+                  <a:lnTo>
+                    <a:pt x="4798709" y="225905"/>
+                  </a:lnTo>
+                  <a:lnTo>
+                    <a:pt x="4727086" y="216619"/>
+                  </a:lnTo>
+                  <a:lnTo>
+                    <a:pt x="4655464" y="207199"/>
+                  </a:lnTo>
+                  <a:lnTo>
+                    <a:pt x="4583841" y="197643"/>
+                  </a:lnTo>
+                  <a:lnTo>
+                    <a:pt x="4512219" y="187949"/>
+                  </a:lnTo>
+                  <a:lnTo>
+                    <a:pt x="4440596" y="178115"/>
+                  </a:lnTo>
+                  <a:lnTo>
+                    <a:pt x="4368974" y="168139"/>
+                  </a:lnTo>
+                  <a:lnTo>
+                    <a:pt x="4297351" y="158019"/>
+                  </a:lnTo>
+                  <a:lnTo>
+                    <a:pt x="4225729" y="147753"/>
+                  </a:lnTo>
+                  <a:lnTo>
+                    <a:pt x="4154106" y="137339"/>
+                  </a:lnTo>
+                  <a:lnTo>
+                    <a:pt x="4082483" y="126775"/>
+                  </a:lnTo>
+                  <a:lnTo>
+                    <a:pt x="4010861" y="116058"/>
+                  </a:lnTo>
+                  <a:lnTo>
+                    <a:pt x="3939238" y="105186"/>
+                  </a:lnTo>
+                  <a:lnTo>
+                    <a:pt x="3867616" y="94157"/>
+                  </a:lnTo>
+                  <a:lnTo>
+                    <a:pt x="3795993" y="82969"/>
+                  </a:lnTo>
+                  <a:lnTo>
+                    <a:pt x="3724371" y="71620"/>
+                  </a:lnTo>
+                  <a:lnTo>
+                    <a:pt x="3652748" y="60107"/>
+                  </a:lnTo>
+                  <a:lnTo>
+                    <a:pt x="3581126" y="48428"/>
+                  </a:lnTo>
+                  <a:lnTo>
+                    <a:pt x="3509503" y="36580"/>
+                  </a:lnTo>
+                  <a:lnTo>
+                    <a:pt x="3437881" y="24561"/>
+                  </a:lnTo>
+                  <a:lnTo>
+                    <a:pt x="3366258" y="12368"/>
                   </a:lnTo>
                   <a:lnTo>
                     <a:pt x="3294636" y="0"/>
                   </a:lnTo>
                   <a:lnTo>
-                    <a:pt x="3223013" y="48079"/>
-                  </a:lnTo>
-                  <a:lnTo>
-                    <a:pt x="3151391" y="93488"/>
-                  </a:lnTo>
-                  <a:lnTo>
-                    <a:pt x="3079768" y="136376"/>
-                  </a:lnTo>
-                  <a:lnTo>
-                    <a:pt x="3008146" y="176882"/>
-                  </a:lnTo>
-                  <a:lnTo>
-                    <a:pt x="2936523" y="215139"/>
-                  </a:lnTo>
-                  <a:lnTo>
-                    <a:pt x="2864901" y="251271"/>
-                  </a:lnTo>
-                  <a:lnTo>
-                    <a:pt x="2793278" y="285397"/>
-                  </a:lnTo>
-                  <a:lnTo>
-                    <a:pt x="2721655" y="317627"/>
-                  </a:lnTo>
-                  <a:lnTo>
-                    <a:pt x="2650033" y="348068"/>
-                  </a:lnTo>
-                  <a:lnTo>
-                    <a:pt x="2578410" y="376818"/>
-                  </a:lnTo>
-                  <a:lnTo>
-                    <a:pt x="2506788" y="403972"/>
-                  </a:lnTo>
-                  <a:lnTo>
-                    <a:pt x="2435165" y="429618"/>
-                  </a:lnTo>
-                  <a:lnTo>
-                    <a:pt x="2363543" y="453840"/>
-                  </a:lnTo>
-                  <a:lnTo>
-                    <a:pt x="2291920" y="476717"/>
-                  </a:lnTo>
-                  <a:lnTo>
-                    <a:pt x="2220298" y="498323"/>
-                  </a:lnTo>
-                  <a:lnTo>
-                    <a:pt x="2148675" y="518729"/>
-                  </a:lnTo>
-                  <a:lnTo>
-                    <a:pt x="2077053" y="538003"/>
-                  </a:lnTo>
-                  <a:lnTo>
-                    <a:pt x="2005430" y="556205"/>
-                  </a:lnTo>
-                  <a:lnTo>
-                    <a:pt x="1933808" y="573398"/>
-                  </a:lnTo>
-                  <a:lnTo>
-                    <a:pt x="1862185" y="589635"/>
-                  </a:lnTo>
-                  <a:lnTo>
-                    <a:pt x="1790563" y="604971"/>
-                  </a:lnTo>
-                  <a:lnTo>
-                    <a:pt x="1718940" y="619455"/>
-                  </a:lnTo>
-                  <a:lnTo>
-                    <a:pt x="1647318" y="633135"/>
-                  </a:lnTo>
-                  <a:lnTo>
-                    <a:pt x="1575695" y="646055"/>
-                  </a:lnTo>
-                  <a:lnTo>
-                    <a:pt x="1504073" y="658257"/>
-                  </a:lnTo>
-                  <a:lnTo>
-                    <a:pt x="1432450" y="669782"/>
-                  </a:lnTo>
-                  <a:lnTo>
-                    <a:pt x="1360827" y="680667"/>
-                  </a:lnTo>
-                  <a:lnTo>
-                    <a:pt x="1289205" y="690948"/>
-                  </a:lnTo>
-                  <a:lnTo>
-                    <a:pt x="1217582" y="700657"/>
-                  </a:lnTo>
-                  <a:lnTo>
-                    <a:pt x="1145960" y="709828"/>
-                  </a:lnTo>
-                  <a:lnTo>
-                    <a:pt x="1074337" y="718489"/>
-                  </a:lnTo>
-                  <a:lnTo>
-                    <a:pt x="1002715" y="726669"/>
-                  </a:lnTo>
-                  <a:lnTo>
-                    <a:pt x="931092" y="734395"/>
-                  </a:lnTo>
-                  <a:lnTo>
-                    <a:pt x="859470" y="741692"/>
-                  </a:lnTo>
-                  <a:lnTo>
-                    <a:pt x="787847" y="748584"/>
-                  </a:lnTo>
-                  <a:lnTo>
-                    <a:pt x="716225" y="755093"/>
-                  </a:lnTo>
-                  <a:lnTo>
-                    <a:pt x="644602" y="761240"/>
-                  </a:lnTo>
-                  <a:lnTo>
-                    <a:pt x="572980" y="767046"/>
-                  </a:lnTo>
-                  <a:lnTo>
-                    <a:pt x="501357" y="772530"/>
-                  </a:lnTo>
-                  <a:lnTo>
-                    <a:pt x="429735" y="777709"/>
-                  </a:lnTo>
-                  <a:lnTo>
-                    <a:pt x="358112" y="782601"/>
-                  </a:lnTo>
-                  <a:lnTo>
-                    <a:pt x="286490" y="787221"/>
-                  </a:lnTo>
-                  <a:lnTo>
-                    <a:pt x="214867" y="791584"/>
-                  </a:lnTo>
-                  <a:lnTo>
-                    <a:pt x="143245" y="795705"/>
-                  </a:lnTo>
-                  <a:lnTo>
-                    <a:pt x="71622" y="799597"/>
-                  </a:lnTo>
-                  <a:lnTo>
-                    <a:pt x="0" y="803273"/>
+                    <a:pt x="3223013" y="45978"/>
+                  </a:lnTo>
+                  <a:lnTo>
+                    <a:pt x="3151391" y="91750"/>
+                  </a:lnTo>
+                  <a:lnTo>
+                    <a:pt x="3079768" y="134977"/>
+                  </a:lnTo>
+                  <a:lnTo>
+                    <a:pt x="3008146" y="175800"/>
+                  </a:lnTo>
+                  <a:lnTo>
+                    <a:pt x="2936523" y="214354"/>
+                  </a:lnTo>
+                  <a:lnTo>
+                    <a:pt x="2864901" y="250763"/>
+                  </a:lnTo>
+                  <a:lnTo>
+                    <a:pt x="2793278" y="285149"/>
+                  </a:lnTo>
+                  <a:lnTo>
+                    <a:pt x="2721655" y="317622"/>
+                  </a:lnTo>
+                  <a:lnTo>
+                    <a:pt x="2650033" y="348290"/>
+                  </a:lnTo>
+                  <a:lnTo>
+                    <a:pt x="2578410" y="377252"/>
+                  </a:lnTo>
+                  <a:lnTo>
+                    <a:pt x="2506788" y="404605"/>
+                  </a:lnTo>
+                  <a:lnTo>
+                    <a:pt x="2435165" y="430436"/>
+                  </a:lnTo>
+                  <a:lnTo>
+                    <a:pt x="2363543" y="454831"/>
+                  </a:lnTo>
+                  <a:lnTo>
+                    <a:pt x="2291920" y="477870"/>
+                  </a:lnTo>
+                  <a:lnTo>
+                    <a:pt x="2220298" y="499627"/>
+                  </a:lnTo>
+                  <a:lnTo>
+                    <a:pt x="2148675" y="520175"/>
+                  </a:lnTo>
+                  <a:lnTo>
+                    <a:pt x="2077053" y="539581"/>
+                  </a:lnTo>
+                  <a:lnTo>
+                    <a:pt x="2005430" y="557907"/>
+                  </a:lnTo>
+                  <a:lnTo>
+                    <a:pt x="1933808" y="575215"/>
+                  </a:lnTo>
+                  <a:lnTo>
+                    <a:pt x="1862185" y="591560"/>
+                  </a:lnTo>
+                  <a:lnTo>
+                    <a:pt x="1790563" y="606996"/>
+                  </a:lnTo>
+                  <a:lnTo>
+                    <a:pt x="1718940" y="621574"/>
+                  </a:lnTo>
+                  <a:lnTo>
+                    <a:pt x="1647318" y="635341"/>
+                  </a:lnTo>
+                  <a:lnTo>
+                    <a:pt x="1575695" y="648343"/>
+                  </a:lnTo>
+                  <a:lnTo>
+                    <a:pt x="1504073" y="660622"/>
+                  </a:lnTo>
+                  <a:lnTo>
+                    <a:pt x="1432450" y="672218"/>
+                  </a:lnTo>
+                  <a:lnTo>
+                    <a:pt x="1360827" y="683170"/>
+                  </a:lnTo>
+                  <a:lnTo>
+                    <a:pt x="1289205" y="693512"/>
+                  </a:lnTo>
+                  <a:lnTo>
+                    <a:pt x="1217582" y="703280"/>
+                  </a:lnTo>
+                  <a:lnTo>
+                    <a:pt x="1145960" y="712504"/>
+                  </a:lnTo>
+                  <a:lnTo>
+                    <a:pt x="1074337" y="721216"/>
+                  </a:lnTo>
+                  <a:lnTo>
+                    <a:pt x="1002715" y="729443"/>
+                  </a:lnTo>
+                  <a:lnTo>
+                    <a:pt x="931092" y="737212"/>
+                  </a:lnTo>
+                  <a:lnTo>
+                    <a:pt x="859470" y="744550"/>
+                  </a:lnTo>
+                  <a:lnTo>
+                    <a:pt x="787847" y="751480"/>
+                  </a:lnTo>
+                  <a:lnTo>
+                    <a:pt x="716225" y="758024"/>
+                  </a:lnTo>
+                  <a:lnTo>
+                    <a:pt x="644602" y="764204"/>
+                  </a:lnTo>
+                  <a:lnTo>
+                    <a:pt x="572980" y="770041"/>
+                  </a:lnTo>
+                  <a:lnTo>
+                    <a:pt x="501357" y="775553"/>
+                  </a:lnTo>
+                  <a:lnTo>
+                    <a:pt x="429735" y="780759"/>
+                  </a:lnTo>
+                  <a:lnTo>
+                    <a:pt x="358112" y="785676"/>
+                  </a:lnTo>
+                  <a:lnTo>
+                    <a:pt x="286490" y="790319"/>
+                  </a:lnTo>
+                  <a:lnTo>
+                    <a:pt x="214867" y="794703"/>
+                  </a:lnTo>
+                  <a:lnTo>
+                    <a:pt x="143245" y="798844"/>
+                  </a:lnTo>
+                  <a:lnTo>
+                    <a:pt x="71622" y="802755"/>
+                  </a:lnTo>
+                  <a:lnTo>
+                    <a:pt x="0" y="806448"/>
                   </a:lnTo>
                 </a:path>
               </a:pathLst>
@@ -4081,309 +4081,309 @@
           </p:nvSpPr>
           <p:spPr>
             <a:xfrm>
-              <a:off x="1172049" y="2848770"/>
-              <a:ext cx="7090630" cy="2376161"/>
+              <a:off x="1172049" y="2837917"/>
+              <a:ext cx="7090630" cy="2386609"/>
             </a:xfrm>
             <a:custGeom>
               <a:avLst/>
               <a:pathLst>
-                <a:path w="7090630" h="2376161">
+                <a:path w="7090630" h="2386609">
                   <a:moveTo>
-                    <a:pt x="0" y="2376161"/>
+                    <a:pt x="0" y="2386609"/>
                   </a:moveTo>
                   <a:lnTo>
-                    <a:pt x="71622" y="2369143"/>
-                  </a:lnTo>
-                  <a:lnTo>
-                    <a:pt x="143245" y="2361974"/>
-                  </a:lnTo>
-                  <a:lnTo>
-                    <a:pt x="214867" y="2354649"/>
-                  </a:lnTo>
-                  <a:lnTo>
-                    <a:pt x="286490" y="2347166"/>
-                  </a:lnTo>
-                  <a:lnTo>
-                    <a:pt x="358112" y="2339521"/>
-                  </a:lnTo>
-                  <a:lnTo>
-                    <a:pt x="429735" y="2331711"/>
-                  </a:lnTo>
-                  <a:lnTo>
-                    <a:pt x="501357" y="2323731"/>
-                  </a:lnTo>
-                  <a:lnTo>
-                    <a:pt x="572980" y="2315579"/>
-                  </a:lnTo>
-                  <a:lnTo>
-                    <a:pt x="644602" y="2307251"/>
-                  </a:lnTo>
-                  <a:lnTo>
-                    <a:pt x="716225" y="2298742"/>
-                  </a:lnTo>
-                  <a:lnTo>
-                    <a:pt x="787847" y="2290049"/>
-                  </a:lnTo>
-                  <a:lnTo>
-                    <a:pt x="859470" y="2281168"/>
-                  </a:lnTo>
-                  <a:lnTo>
-                    <a:pt x="931092" y="2272095"/>
-                  </a:lnTo>
-                  <a:lnTo>
-                    <a:pt x="1002715" y="2262825"/>
-                  </a:lnTo>
-                  <a:lnTo>
-                    <a:pt x="1074337" y="2253355"/>
-                  </a:lnTo>
-                  <a:lnTo>
-                    <a:pt x="1145960" y="2243680"/>
-                  </a:lnTo>
-                  <a:lnTo>
-                    <a:pt x="1217582" y="2233795"/>
-                  </a:lnTo>
-                  <a:lnTo>
-                    <a:pt x="1289205" y="2223697"/>
-                  </a:lnTo>
-                  <a:lnTo>
-                    <a:pt x="1360827" y="2213380"/>
-                  </a:lnTo>
-                  <a:lnTo>
-                    <a:pt x="1432450" y="2202839"/>
-                  </a:lnTo>
-                  <a:lnTo>
-                    <a:pt x="1504073" y="2192071"/>
-                  </a:lnTo>
-                  <a:lnTo>
-                    <a:pt x="1575695" y="2181070"/>
-                  </a:lnTo>
-                  <a:lnTo>
-                    <a:pt x="1647318" y="2169830"/>
-                  </a:lnTo>
-                  <a:lnTo>
-                    <a:pt x="1718940" y="2158348"/>
-                  </a:lnTo>
-                  <a:lnTo>
-                    <a:pt x="1790563" y="2146616"/>
-                  </a:lnTo>
-                  <a:lnTo>
-                    <a:pt x="1862185" y="2134631"/>
-                  </a:lnTo>
-                  <a:lnTo>
-                    <a:pt x="1933808" y="2122387"/>
-                  </a:lnTo>
-                  <a:lnTo>
-                    <a:pt x="2005430" y="2109878"/>
-                  </a:lnTo>
-                  <a:lnTo>
-                    <a:pt x="2077053" y="2097098"/>
-                  </a:lnTo>
-                  <a:lnTo>
-                    <a:pt x="2148675" y="2084041"/>
-                  </a:lnTo>
-                  <a:lnTo>
-                    <a:pt x="2220298" y="2070702"/>
-                  </a:lnTo>
-                  <a:lnTo>
-                    <a:pt x="2291920" y="2057074"/>
-                  </a:lnTo>
-                  <a:lnTo>
-                    <a:pt x="2363543" y="2043151"/>
-                  </a:lnTo>
-                  <a:lnTo>
-                    <a:pt x="2435165" y="2028927"/>
-                  </a:lnTo>
-                  <a:lnTo>
-                    <a:pt x="2506788" y="2014395"/>
-                  </a:lnTo>
-                  <a:lnTo>
-                    <a:pt x="2578410" y="1999549"/>
-                  </a:lnTo>
-                  <a:lnTo>
-                    <a:pt x="2650033" y="1984381"/>
-                  </a:lnTo>
-                  <a:lnTo>
-                    <a:pt x="2721655" y="1968885"/>
-                  </a:lnTo>
-                  <a:lnTo>
-                    <a:pt x="2793278" y="1953054"/>
-                  </a:lnTo>
-                  <a:lnTo>
-                    <a:pt x="2864901" y="1936880"/>
-                  </a:lnTo>
-                  <a:lnTo>
-                    <a:pt x="2936523" y="1920356"/>
-                  </a:lnTo>
-                  <a:lnTo>
-                    <a:pt x="3008146" y="1903474"/>
-                  </a:lnTo>
-                  <a:lnTo>
-                    <a:pt x="3079768" y="1886228"/>
-                  </a:lnTo>
-                  <a:lnTo>
-                    <a:pt x="3151391" y="1868608"/>
-                  </a:lnTo>
-                  <a:lnTo>
-                    <a:pt x="3223013" y="1850606"/>
-                  </a:lnTo>
-                  <a:lnTo>
-                    <a:pt x="3294636" y="1832215"/>
-                  </a:lnTo>
-                  <a:lnTo>
-                    <a:pt x="3366258" y="1813426"/>
-                  </a:lnTo>
-                  <a:lnTo>
-                    <a:pt x="3437881" y="1794231"/>
-                  </a:lnTo>
-                  <a:lnTo>
-                    <a:pt x="3509503" y="1774620"/>
-                  </a:lnTo>
-                  <a:lnTo>
-                    <a:pt x="3581126" y="1754585"/>
-                  </a:lnTo>
-                  <a:lnTo>
-                    <a:pt x="3652748" y="1734116"/>
-                  </a:lnTo>
-                  <a:lnTo>
-                    <a:pt x="3724371" y="1713204"/>
-                  </a:lnTo>
-                  <a:lnTo>
-                    <a:pt x="3795993" y="1691840"/>
-                  </a:lnTo>
-                  <a:lnTo>
-                    <a:pt x="3867616" y="1670013"/>
-                  </a:lnTo>
-                  <a:lnTo>
-                    <a:pt x="3939238" y="1647714"/>
-                  </a:lnTo>
-                  <a:lnTo>
-                    <a:pt x="4010861" y="1624932"/>
-                  </a:lnTo>
-                  <a:lnTo>
-                    <a:pt x="4082483" y="1601657"/>
-                  </a:lnTo>
-                  <a:lnTo>
-                    <a:pt x="4154106" y="1577879"/>
-                  </a:lnTo>
-                  <a:lnTo>
-                    <a:pt x="4225729" y="1553586"/>
-                  </a:lnTo>
-                  <a:lnTo>
-                    <a:pt x="4297351" y="1528768"/>
-                  </a:lnTo>
-                  <a:lnTo>
-                    <a:pt x="4368974" y="1503412"/>
-                  </a:lnTo>
-                  <a:lnTo>
-                    <a:pt x="4440596" y="1477507"/>
-                  </a:lnTo>
-                  <a:lnTo>
-                    <a:pt x="4512219" y="1451042"/>
-                  </a:lnTo>
-                  <a:lnTo>
-                    <a:pt x="4583841" y="1424005"/>
-                  </a:lnTo>
-                  <a:lnTo>
-                    <a:pt x="4655464" y="1396382"/>
-                  </a:lnTo>
-                  <a:lnTo>
-                    <a:pt x="4727086" y="1368161"/>
-                  </a:lnTo>
-                  <a:lnTo>
-                    <a:pt x="4798709" y="1339330"/>
-                  </a:lnTo>
-                  <a:lnTo>
-                    <a:pt x="4870331" y="1309874"/>
-                  </a:lnTo>
-                  <a:lnTo>
-                    <a:pt x="4941954" y="1279782"/>
-                  </a:lnTo>
-                  <a:lnTo>
-                    <a:pt x="5013576" y="1249038"/>
-                  </a:lnTo>
-                  <a:lnTo>
-                    <a:pt x="5085199" y="1217629"/>
-                  </a:lnTo>
-                  <a:lnTo>
-                    <a:pt x="5156821" y="1185540"/>
-                  </a:lnTo>
-                  <a:lnTo>
-                    <a:pt x="5228444" y="1152756"/>
-                  </a:lnTo>
-                  <a:lnTo>
-                    <a:pt x="5300066" y="1119263"/>
-                  </a:lnTo>
-                  <a:lnTo>
-                    <a:pt x="5371689" y="1085046"/>
-                  </a:lnTo>
-                  <a:lnTo>
-                    <a:pt x="5443311" y="1050087"/>
-                  </a:lnTo>
-                  <a:lnTo>
-                    <a:pt x="5514934" y="1014373"/>
-                  </a:lnTo>
-                  <a:lnTo>
-                    <a:pt x="5586557" y="977885"/>
-                  </a:lnTo>
-                  <a:lnTo>
-                    <a:pt x="5658179" y="940608"/>
-                  </a:lnTo>
-                  <a:lnTo>
-                    <a:pt x="5729802" y="902524"/>
-                  </a:lnTo>
-                  <a:lnTo>
-                    <a:pt x="5801424" y="863616"/>
-                  </a:lnTo>
-                  <a:lnTo>
-                    <a:pt x="5873047" y="823866"/>
-                  </a:lnTo>
-                  <a:lnTo>
-                    <a:pt x="5944669" y="783256"/>
-                  </a:lnTo>
-                  <a:lnTo>
-                    <a:pt x="6016292" y="741766"/>
-                  </a:lnTo>
-                  <a:lnTo>
-                    <a:pt x="6087914" y="699379"/>
-                  </a:lnTo>
-                  <a:lnTo>
-                    <a:pt x="6159537" y="656075"/>
-                  </a:lnTo>
-                  <a:lnTo>
-                    <a:pt x="6231159" y="611834"/>
-                  </a:lnTo>
-                  <a:lnTo>
-                    <a:pt x="6302782" y="566635"/>
-                  </a:lnTo>
-                  <a:lnTo>
-                    <a:pt x="6374404" y="520458"/>
-                  </a:lnTo>
-                  <a:lnTo>
-                    <a:pt x="6446027" y="473282"/>
-                  </a:lnTo>
-                  <a:lnTo>
-                    <a:pt x="6517649" y="425085"/>
-                  </a:lnTo>
-                  <a:lnTo>
-                    <a:pt x="6589272" y="375844"/>
-                  </a:lnTo>
-                  <a:lnTo>
-                    <a:pt x="6660894" y="325539"/>
-                  </a:lnTo>
-                  <a:lnTo>
-                    <a:pt x="6732517" y="274144"/>
-                  </a:lnTo>
-                  <a:lnTo>
-                    <a:pt x="6804139" y="221638"/>
-                  </a:lnTo>
-                  <a:lnTo>
-                    <a:pt x="6875762" y="167995"/>
-                  </a:lnTo>
-                  <a:lnTo>
-                    <a:pt x="6947385" y="113191"/>
-                  </a:lnTo>
-                  <a:lnTo>
-                    <a:pt x="7019007" y="57201"/>
+                    <a:pt x="71622" y="2379574"/>
+                  </a:lnTo>
+                  <a:lnTo>
+                    <a:pt x="143245" y="2372386"/>
+                  </a:lnTo>
+                  <a:lnTo>
+                    <a:pt x="214867" y="2365042"/>
+                  </a:lnTo>
+                  <a:lnTo>
+                    <a:pt x="286490" y="2357539"/>
+                  </a:lnTo>
+                  <a:lnTo>
+                    <a:pt x="358112" y="2349873"/>
+                  </a:lnTo>
+                  <a:lnTo>
+                    <a:pt x="429735" y="2342042"/>
+                  </a:lnTo>
+                  <a:lnTo>
+                    <a:pt x="501357" y="2334040"/>
+                  </a:lnTo>
+                  <a:lnTo>
+                    <a:pt x="572980" y="2325866"/>
+                  </a:lnTo>
+                  <a:lnTo>
+                    <a:pt x="644602" y="2317514"/>
+                  </a:lnTo>
+                  <a:lnTo>
+                    <a:pt x="716225" y="2308981"/>
+                  </a:lnTo>
+                  <a:lnTo>
+                    <a:pt x="787847" y="2300263"/>
+                  </a:lnTo>
+                  <a:lnTo>
+                    <a:pt x="859470" y="2291357"/>
+                  </a:lnTo>
+                  <a:lnTo>
+                    <a:pt x="931092" y="2282257"/>
+                  </a:lnTo>
+                  <a:lnTo>
+                    <a:pt x="1002715" y="2272960"/>
+                  </a:lnTo>
+                  <a:lnTo>
+                    <a:pt x="1074337" y="2263462"/>
+                  </a:lnTo>
+                  <a:lnTo>
+                    <a:pt x="1145960" y="2253758"/>
+                  </a:lnTo>
+                  <a:lnTo>
+                    <a:pt x="1217582" y="2243844"/>
+                  </a:lnTo>
+                  <a:lnTo>
+                    <a:pt x="1289205" y="2233715"/>
+                  </a:lnTo>
+                  <a:lnTo>
+                    <a:pt x="1360827" y="2223366"/>
+                  </a:lnTo>
+                  <a:lnTo>
+                    <a:pt x="1432450" y="2212793"/>
+                  </a:lnTo>
+                  <a:lnTo>
+                    <a:pt x="1504073" y="2201991"/>
+                  </a:lnTo>
+                  <a:lnTo>
+                    <a:pt x="1575695" y="2190955"/>
+                  </a:lnTo>
+                  <a:lnTo>
+                    <a:pt x="1647318" y="2179680"/>
+                  </a:lnTo>
+                  <a:lnTo>
+                    <a:pt x="1718940" y="2168160"/>
+                  </a:lnTo>
+                  <a:lnTo>
+                    <a:pt x="1790563" y="2156391"/>
+                  </a:lnTo>
+                  <a:lnTo>
+                    <a:pt x="1862185" y="2144367"/>
+                  </a:lnTo>
+                  <a:lnTo>
+                    <a:pt x="1933808" y="2132082"/>
+                  </a:lnTo>
+                  <a:lnTo>
+                    <a:pt x="2005430" y="2119531"/>
+                  </a:lnTo>
+                  <a:lnTo>
+                    <a:pt x="2077053" y="2106708"/>
+                  </a:lnTo>
+                  <a:lnTo>
+                    <a:pt x="2148675" y="2093607"/>
+                  </a:lnTo>
+                  <a:lnTo>
+                    <a:pt x="2220298" y="2080223"/>
+                  </a:lnTo>
+                  <a:lnTo>
+                    <a:pt x="2291920" y="2066548"/>
+                  </a:lnTo>
+                  <a:lnTo>
+                    <a:pt x="2363543" y="2052577"/>
+                  </a:lnTo>
+                  <a:lnTo>
+                    <a:pt x="2435165" y="2038303"/>
+                  </a:lnTo>
+                  <a:lnTo>
+                    <a:pt x="2506788" y="2023720"/>
+                  </a:lnTo>
+                  <a:lnTo>
+                    <a:pt x="2578410" y="2008821"/>
+                  </a:lnTo>
+                  <a:lnTo>
+                    <a:pt x="2650033" y="1993599"/>
+                  </a:lnTo>
+                  <a:lnTo>
+                    <a:pt x="2721655" y="1978047"/>
+                  </a:lnTo>
+                  <a:lnTo>
+                    <a:pt x="2793278" y="1962158"/>
+                  </a:lnTo>
+                  <a:lnTo>
+                    <a:pt x="2864901" y="1945925"/>
+                  </a:lnTo>
+                  <a:lnTo>
+                    <a:pt x="2936523" y="1929340"/>
+                  </a:lnTo>
+                  <a:lnTo>
+                    <a:pt x="3008146" y="1912396"/>
+                  </a:lnTo>
+                  <a:lnTo>
+                    <a:pt x="3079768" y="1895085"/>
+                  </a:lnTo>
+                  <a:lnTo>
+                    <a:pt x="3151391" y="1877398"/>
+                  </a:lnTo>
+                  <a:lnTo>
+                    <a:pt x="3223013" y="1859329"/>
+                  </a:lnTo>
+                  <a:lnTo>
+                    <a:pt x="3294636" y="1840867"/>
+                  </a:lnTo>
+                  <a:lnTo>
+                    <a:pt x="3366258" y="1822006"/>
+                  </a:lnTo>
+                  <a:lnTo>
+                    <a:pt x="3437881" y="1802736"/>
+                  </a:lnTo>
+                  <a:lnTo>
+                    <a:pt x="3509503" y="1783048"/>
+                  </a:lnTo>
+                  <a:lnTo>
+                    <a:pt x="3581126" y="1762934"/>
+                  </a:lnTo>
+                  <a:lnTo>
+                    <a:pt x="3652748" y="1742384"/>
+                  </a:lnTo>
+                  <a:lnTo>
+                    <a:pt x="3724371" y="1721388"/>
+                  </a:lnTo>
+                  <a:lnTo>
+                    <a:pt x="3795993" y="1699938"/>
+                  </a:lnTo>
+                  <a:lnTo>
+                    <a:pt x="3867616" y="1678023"/>
+                  </a:lnTo>
+                  <a:lnTo>
+                    <a:pt x="3939238" y="1655633"/>
+                  </a:lnTo>
+                  <a:lnTo>
+                    <a:pt x="4010861" y="1632758"/>
+                  </a:lnTo>
+                  <a:lnTo>
+                    <a:pt x="4082483" y="1609387"/>
+                  </a:lnTo>
+                  <a:lnTo>
+                    <a:pt x="4154106" y="1585509"/>
+                  </a:lnTo>
+                  <a:lnTo>
+                    <a:pt x="4225729" y="1561115"/>
+                  </a:lnTo>
+                  <a:lnTo>
+                    <a:pt x="4297351" y="1536191"/>
+                  </a:lnTo>
+                  <a:lnTo>
+                    <a:pt x="4368974" y="1510728"/>
+                  </a:lnTo>
+                  <a:lnTo>
+                    <a:pt x="4440596" y="1484713"/>
+                  </a:lnTo>
+                  <a:lnTo>
+                    <a:pt x="4512219" y="1458134"/>
+                  </a:lnTo>
+                  <a:lnTo>
+                    <a:pt x="4583841" y="1430979"/>
+                  </a:lnTo>
+                  <a:lnTo>
+                    <a:pt x="4655464" y="1403235"/>
+                  </a:lnTo>
+                  <a:lnTo>
+                    <a:pt x="4727086" y="1374891"/>
+                  </a:lnTo>
+                  <a:lnTo>
+                    <a:pt x="4798709" y="1345932"/>
+                  </a:lnTo>
+                  <a:lnTo>
+                    <a:pt x="4870331" y="1316346"/>
+                  </a:lnTo>
+                  <a:lnTo>
+                    <a:pt x="4941954" y="1286119"/>
+                  </a:lnTo>
+                  <a:lnTo>
+                    <a:pt x="5013576" y="1255236"/>
+                  </a:lnTo>
+                  <a:lnTo>
+                    <a:pt x="5085199" y="1223685"/>
+                  </a:lnTo>
+                  <a:lnTo>
+                    <a:pt x="5156821" y="1191450"/>
+                  </a:lnTo>
+                  <a:lnTo>
+                    <a:pt x="5228444" y="1158516"/>
+                  </a:lnTo>
+                  <a:lnTo>
+                    <a:pt x="5300066" y="1124869"/>
+                  </a:lnTo>
+                  <a:lnTo>
+                    <a:pt x="5371689" y="1090492"/>
+                  </a:lnTo>
+                  <a:lnTo>
+                    <a:pt x="5443311" y="1055371"/>
+                  </a:lnTo>
+                  <a:lnTo>
+                    <a:pt x="5514934" y="1019488"/>
+                  </a:lnTo>
+                  <a:lnTo>
+                    <a:pt x="5586557" y="982828"/>
+                  </a:lnTo>
+                  <a:lnTo>
+                    <a:pt x="5658179" y="945374"/>
+                  </a:lnTo>
+                  <a:lnTo>
+                    <a:pt x="5729802" y="907108"/>
+                  </a:lnTo>
+                  <a:lnTo>
+                    <a:pt x="5801424" y="868013"/>
+                  </a:lnTo>
+                  <a:lnTo>
+                    <a:pt x="5873047" y="828070"/>
+                  </a:lnTo>
+                  <a:lnTo>
+                    <a:pt x="5944669" y="787263"/>
+                  </a:lnTo>
+                  <a:lnTo>
+                    <a:pt x="6016292" y="745570"/>
+                  </a:lnTo>
+                  <a:lnTo>
+                    <a:pt x="6087914" y="702975"/>
+                  </a:lnTo>
+                  <a:lnTo>
+                    <a:pt x="6159537" y="659456"/>
+                  </a:lnTo>
+                  <a:lnTo>
+                    <a:pt x="6231159" y="614995"/>
+                  </a:lnTo>
+                  <a:lnTo>
+                    <a:pt x="6302782" y="569570"/>
+                  </a:lnTo>
+                  <a:lnTo>
+                    <a:pt x="6374404" y="523160"/>
+                  </a:lnTo>
+                  <a:lnTo>
+                    <a:pt x="6446027" y="475745"/>
+                  </a:lnTo>
+                  <a:lnTo>
+                    <a:pt x="6517649" y="427303"/>
+                  </a:lnTo>
+                  <a:lnTo>
+                    <a:pt x="6589272" y="377811"/>
+                  </a:lnTo>
+                  <a:lnTo>
+                    <a:pt x="6660894" y="327246"/>
+                  </a:lnTo>
+                  <a:lnTo>
+                    <a:pt x="6732517" y="275586"/>
+                  </a:lnTo>
+                  <a:lnTo>
+                    <a:pt x="6804139" y="222806"/>
+                  </a:lnTo>
+                  <a:lnTo>
+                    <a:pt x="6875762" y="168883"/>
+                  </a:lnTo>
+                  <a:lnTo>
+                    <a:pt x="6947385" y="113791"/>
+                  </a:lnTo>
+                  <a:lnTo>
+                    <a:pt x="7019007" y="57505"/>
                   </a:lnTo>
                   <a:lnTo>
                     <a:pt x="7090630" y="0"/>
@@ -4458,7 +4458,7 @@
           </p:nvSpPr>
           <p:spPr>
             <a:xfrm>
-              <a:off x="4472293" y="1896563"/>
+              <a:off x="4463824" y="1896563"/>
               <a:ext cx="0" cy="3826579"/>
             </a:xfrm>
             <a:custGeom>
@@ -4731,7 +4731,7 @@
           </p:nvSpPr>
           <p:spPr>
             <a:xfrm>
-              <a:off x="2004858" y="5785772"/>
+              <a:off x="2005445" y="5785772"/>
               <a:ext cx="223753" cy="80101"/>
             </a:xfrm>
             <a:prstGeom prst="rect">
@@ -4777,7 +4777,7 @@
           </p:nvSpPr>
           <p:spPr>
             <a:xfrm>
-              <a:off x="4499764" y="5785772"/>
+              <a:off x="4497209" y="5785772"/>
               <a:ext cx="62179" cy="80101"/>
             </a:xfrm>
             <a:prstGeom prst="rect">
@@ -4823,7 +4823,7 @@
           </p:nvSpPr>
           <p:spPr>
             <a:xfrm>
-              <a:off x="6851704" y="5785772"/>
+              <a:off x="6846007" y="5785772"/>
               <a:ext cx="186537" cy="80101"/>
             </a:xfrm>
             <a:prstGeom prst="rect">
